--- a/FlightDB_Presentation.pptx
+++ b/FlightDB_Presentation.pptx
@@ -138,471 +138,6 @@
     <p1510:client id="{5E8E5B95-BA6E-4951-9B7E-0C36492756D5}" v="1" dt="2026-10-13T19:59:42.511"/>
   </p1510:revLst>
 </p1510:revInfo>
-</file>
-
-<file path=ppt/changesInfos/changesInfo1.xml><?xml version="1.0" encoding="utf-8"?>
-<pc:chgInfo xmlns:a="http://schemas.openxmlformats.org/drawingml/2006/main" xmlns:r="http://schemas.openxmlformats.org/officeDocument/2006/relationships" xmlns:ac="http://schemas.microsoft.com/office/drawing/2013/main/command" xmlns:pc="http://schemas.microsoft.com/office/powerpoint/2013/main/command">
-  <pc:docChgLst>
-    <pc:chgData name="Sowmya R" userId="ad0b4a24c9e9d806" providerId="LiveId" clId="{9B7D84C8-4125-4BEC-91B9-D0DE0E182A68}"/>
-    <pc:docChg chg="undo custSel modSld">
-      <pc:chgData name="Sowmya R" userId="ad0b4a24c9e9d806" providerId="LiveId" clId="{9B7D84C8-4125-4BEC-91B9-D0DE0E182A68}" dt="2026-10-13T20:02:50.462" v="65" actId="14100"/>
-      <pc:docMkLst>
-        <pc:docMk/>
-      </pc:docMkLst>
-      <pc:sldChg chg="modSp mod">
-        <pc:chgData name="Sowmya R" userId="ad0b4a24c9e9d806" providerId="LiveId" clId="{9B7D84C8-4125-4BEC-91B9-D0DE0E182A68}" dt="2026-10-13T19:43:20.440" v="3" actId="20577"/>
-        <pc:sldMkLst>
-          <pc:docMk/>
-          <pc:sldMk cId="0" sldId="264"/>
-        </pc:sldMkLst>
-        <pc:spChg chg="mod">
-          <ac:chgData name="Sowmya R" userId="ad0b4a24c9e9d806" providerId="LiveId" clId="{9B7D84C8-4125-4BEC-91B9-D0DE0E182A68}" dt="2026-10-13T19:43:20.440" v="3" actId="20577"/>
-          <ac:spMkLst>
-            <pc:docMk/>
-            <pc:sldMk cId="0" sldId="264"/>
-            <ac:spMk id="5" creationId="{00000000-0000-0000-0000-000000000000}"/>
-          </ac:spMkLst>
-        </pc:spChg>
-      </pc:sldChg>
-      <pc:sldChg chg="modSp mod">
-        <pc:chgData name="Sowmya R" userId="ad0b4a24c9e9d806" providerId="LiveId" clId="{9B7D84C8-4125-4BEC-91B9-D0DE0E182A68}" dt="2026-10-13T19:43:25.521" v="4" actId="20577"/>
-        <pc:sldMkLst>
-          <pc:docMk/>
-          <pc:sldMk cId="0" sldId="265"/>
-        </pc:sldMkLst>
-        <pc:spChg chg="mod">
-          <ac:chgData name="Sowmya R" userId="ad0b4a24c9e9d806" providerId="LiveId" clId="{9B7D84C8-4125-4BEC-91B9-D0DE0E182A68}" dt="2026-10-13T19:43:25.521" v="4" actId="20577"/>
-          <ac:spMkLst>
-            <pc:docMk/>
-            <pc:sldMk cId="0" sldId="265"/>
-            <ac:spMk id="5" creationId="{00000000-0000-0000-0000-000000000000}"/>
-          </ac:spMkLst>
-        </pc:spChg>
-      </pc:sldChg>
-      <pc:sldChg chg="modSp mod">
-        <pc:chgData name="Sowmya R" userId="ad0b4a24c9e9d806" providerId="LiveId" clId="{9B7D84C8-4125-4BEC-91B9-D0DE0E182A68}" dt="2026-10-13T19:43:32.169" v="6" actId="20577"/>
-        <pc:sldMkLst>
-          <pc:docMk/>
-          <pc:sldMk cId="0" sldId="266"/>
-        </pc:sldMkLst>
-        <pc:spChg chg="mod">
-          <ac:chgData name="Sowmya R" userId="ad0b4a24c9e9d806" providerId="LiveId" clId="{9B7D84C8-4125-4BEC-91B9-D0DE0E182A68}" dt="2026-10-13T19:43:32.169" v="6" actId="20577"/>
-          <ac:spMkLst>
-            <pc:docMk/>
-            <pc:sldMk cId="0" sldId="266"/>
-            <ac:spMk id="5" creationId="{00000000-0000-0000-0000-000000000000}"/>
-          </ac:spMkLst>
-        </pc:spChg>
-      </pc:sldChg>
-      <pc:sldChg chg="modSp mod">
-        <pc:chgData name="Sowmya R" userId="ad0b4a24c9e9d806" providerId="LiveId" clId="{9B7D84C8-4125-4BEC-91B9-D0DE0E182A68}" dt="2026-10-13T19:43:37.207" v="8" actId="20577"/>
-        <pc:sldMkLst>
-          <pc:docMk/>
-          <pc:sldMk cId="0" sldId="267"/>
-        </pc:sldMkLst>
-        <pc:spChg chg="mod">
-          <ac:chgData name="Sowmya R" userId="ad0b4a24c9e9d806" providerId="LiveId" clId="{9B7D84C8-4125-4BEC-91B9-D0DE0E182A68}" dt="2026-10-13T19:43:37.207" v="8" actId="20577"/>
-          <ac:spMkLst>
-            <pc:docMk/>
-            <pc:sldMk cId="0" sldId="267"/>
-            <ac:spMk id="5" creationId="{00000000-0000-0000-0000-000000000000}"/>
-          </ac:spMkLst>
-        </pc:spChg>
-      </pc:sldChg>
-      <pc:sldChg chg="modSp mod">
-        <pc:chgData name="Sowmya R" userId="ad0b4a24c9e9d806" providerId="LiveId" clId="{9B7D84C8-4125-4BEC-91B9-D0DE0E182A68}" dt="2026-10-13T19:43:41.151" v="10" actId="20577"/>
-        <pc:sldMkLst>
-          <pc:docMk/>
-          <pc:sldMk cId="0" sldId="268"/>
-        </pc:sldMkLst>
-        <pc:spChg chg="mod">
-          <ac:chgData name="Sowmya R" userId="ad0b4a24c9e9d806" providerId="LiveId" clId="{9B7D84C8-4125-4BEC-91B9-D0DE0E182A68}" dt="2026-10-13T19:43:41.151" v="10" actId="20577"/>
-          <ac:spMkLst>
-            <pc:docMk/>
-            <pc:sldMk cId="0" sldId="268"/>
-            <ac:spMk id="5" creationId="{00000000-0000-0000-0000-000000000000}"/>
-          </ac:spMkLst>
-        </pc:spChg>
-      </pc:sldChg>
-      <pc:sldChg chg="addSp delSp modSp mod">
-        <pc:chgData name="Sowmya R" userId="ad0b4a24c9e9d806" providerId="LiveId" clId="{9B7D84C8-4125-4BEC-91B9-D0DE0E182A68}" dt="2026-10-13T20:01:47.369" v="64" actId="1076"/>
-        <pc:sldMkLst>
-          <pc:docMk/>
-          <pc:sldMk cId="0" sldId="269"/>
-        </pc:sldMkLst>
-        <pc:spChg chg="mod">
-          <ac:chgData name="Sowmya R" userId="ad0b4a24c9e9d806" providerId="LiveId" clId="{9B7D84C8-4125-4BEC-91B9-D0DE0E182A68}" dt="2026-10-13T19:43:45.813" v="12" actId="20577"/>
-          <ac:spMkLst>
-            <pc:docMk/>
-            <pc:sldMk cId="0" sldId="269"/>
-            <ac:spMk id="5" creationId="{00000000-0000-0000-0000-000000000000}"/>
-          </ac:spMkLst>
-        </pc:spChg>
-        <pc:spChg chg="del">
-          <ac:chgData name="Sowmya R" userId="ad0b4a24c9e9d806" providerId="LiveId" clId="{9B7D84C8-4125-4BEC-91B9-D0DE0E182A68}" dt="2026-10-13T20:01:34.874" v="60" actId="478"/>
-          <ac:spMkLst>
-            <pc:docMk/>
-            <pc:sldMk cId="0" sldId="269"/>
-            <ac:spMk id="6" creationId="{00000000-0000-0000-0000-000000000000}"/>
-          </ac:spMkLst>
-        </pc:spChg>
-        <pc:spChg chg="mod">
-          <ac:chgData name="Sowmya R" userId="ad0b4a24c9e9d806" providerId="LiveId" clId="{9B7D84C8-4125-4BEC-91B9-D0DE0E182A68}" dt="2026-10-13T20:01:41.535" v="62" actId="1076"/>
-          <ac:spMkLst>
-            <pc:docMk/>
-            <pc:sldMk cId="0" sldId="269"/>
-            <ac:spMk id="7" creationId="{00000000-0000-0000-0000-000000000000}"/>
-          </ac:spMkLst>
-        </pc:spChg>
-        <pc:spChg chg="del">
-          <ac:chgData name="Sowmya R" userId="ad0b4a24c9e9d806" providerId="LiveId" clId="{9B7D84C8-4125-4BEC-91B9-D0DE0E182A68}" dt="2026-10-13T20:00:11.422" v="47" actId="21"/>
-          <ac:spMkLst>
-            <pc:docMk/>
-            <pc:sldMk cId="0" sldId="269"/>
-            <ac:spMk id="8" creationId="{00000000-0000-0000-0000-000000000000}"/>
-          </ac:spMkLst>
-        </pc:spChg>
-        <pc:spChg chg="del">
-          <ac:chgData name="Sowmya R" userId="ad0b4a24c9e9d806" providerId="LiveId" clId="{9B7D84C8-4125-4BEC-91B9-D0DE0E182A68}" dt="2026-10-13T20:00:11.422" v="47" actId="21"/>
-          <ac:spMkLst>
-            <pc:docMk/>
-            <pc:sldMk cId="0" sldId="269"/>
-            <ac:spMk id="9" creationId="{00000000-0000-0000-0000-000000000000}"/>
-          </ac:spMkLst>
-        </pc:spChg>
-        <pc:spChg chg="del">
-          <ac:chgData name="Sowmya R" userId="ad0b4a24c9e9d806" providerId="LiveId" clId="{9B7D84C8-4125-4BEC-91B9-D0DE0E182A68}" dt="2026-10-13T20:00:11.422" v="47" actId="21"/>
-          <ac:spMkLst>
-            <pc:docMk/>
-            <pc:sldMk cId="0" sldId="269"/>
-            <ac:spMk id="10" creationId="{00000000-0000-0000-0000-000000000000}"/>
-          </ac:spMkLst>
-        </pc:spChg>
-        <pc:spChg chg="del">
-          <ac:chgData name="Sowmya R" userId="ad0b4a24c9e9d806" providerId="LiveId" clId="{9B7D84C8-4125-4BEC-91B9-D0DE0E182A68}" dt="2026-10-13T20:00:11.422" v="47" actId="21"/>
-          <ac:spMkLst>
-            <pc:docMk/>
-            <pc:sldMk cId="0" sldId="269"/>
-            <ac:spMk id="11" creationId="{00000000-0000-0000-0000-000000000000}"/>
-          </ac:spMkLst>
-        </pc:spChg>
-        <pc:spChg chg="del">
-          <ac:chgData name="Sowmya R" userId="ad0b4a24c9e9d806" providerId="LiveId" clId="{9B7D84C8-4125-4BEC-91B9-D0DE0E182A68}" dt="2026-10-13T20:00:11.422" v="47" actId="21"/>
-          <ac:spMkLst>
-            <pc:docMk/>
-            <pc:sldMk cId="0" sldId="269"/>
-            <ac:spMk id="13" creationId="{00000000-0000-0000-0000-000000000000}"/>
-          </ac:spMkLst>
-        </pc:spChg>
-        <pc:spChg chg="del">
-          <ac:chgData name="Sowmya R" userId="ad0b4a24c9e9d806" providerId="LiveId" clId="{9B7D84C8-4125-4BEC-91B9-D0DE0E182A68}" dt="2026-10-13T20:00:11.422" v="47" actId="21"/>
-          <ac:spMkLst>
-            <pc:docMk/>
-            <pc:sldMk cId="0" sldId="269"/>
-            <ac:spMk id="14" creationId="{00000000-0000-0000-0000-000000000000}"/>
-          </ac:spMkLst>
-        </pc:spChg>
-        <pc:spChg chg="del">
-          <ac:chgData name="Sowmya R" userId="ad0b4a24c9e9d806" providerId="LiveId" clId="{9B7D84C8-4125-4BEC-91B9-D0DE0E182A68}" dt="2026-10-13T20:00:11.422" v="47" actId="21"/>
-          <ac:spMkLst>
-            <pc:docMk/>
-            <pc:sldMk cId="0" sldId="269"/>
-            <ac:spMk id="16" creationId="{00000000-0000-0000-0000-000000000000}"/>
-          </ac:spMkLst>
-        </pc:spChg>
-        <pc:spChg chg="del">
-          <ac:chgData name="Sowmya R" userId="ad0b4a24c9e9d806" providerId="LiveId" clId="{9B7D84C8-4125-4BEC-91B9-D0DE0E182A68}" dt="2026-10-13T20:00:11.422" v="47" actId="21"/>
-          <ac:spMkLst>
-            <pc:docMk/>
-            <pc:sldMk cId="0" sldId="269"/>
-            <ac:spMk id="18" creationId="{00000000-0000-0000-0000-000000000000}"/>
-          </ac:spMkLst>
-        </pc:spChg>
-        <pc:spChg chg="del">
-          <ac:chgData name="Sowmya R" userId="ad0b4a24c9e9d806" providerId="LiveId" clId="{9B7D84C8-4125-4BEC-91B9-D0DE0E182A68}" dt="2026-10-13T20:00:11.422" v="47" actId="21"/>
-          <ac:spMkLst>
-            <pc:docMk/>
-            <pc:sldMk cId="0" sldId="269"/>
-            <ac:spMk id="19" creationId="{00000000-0000-0000-0000-000000000000}"/>
-          </ac:spMkLst>
-        </pc:spChg>
-        <pc:spChg chg="del">
-          <ac:chgData name="Sowmya R" userId="ad0b4a24c9e9d806" providerId="LiveId" clId="{9B7D84C8-4125-4BEC-91B9-D0DE0E182A68}" dt="2026-10-13T20:00:11.422" v="47" actId="21"/>
-          <ac:spMkLst>
-            <pc:docMk/>
-            <pc:sldMk cId="0" sldId="269"/>
-            <ac:spMk id="20" creationId="{00000000-0000-0000-0000-000000000000}"/>
-          </ac:spMkLst>
-        </pc:spChg>
-        <pc:spChg chg="del">
-          <ac:chgData name="Sowmya R" userId="ad0b4a24c9e9d806" providerId="LiveId" clId="{9B7D84C8-4125-4BEC-91B9-D0DE0E182A68}" dt="2026-10-13T19:59:49.281" v="42" actId="478"/>
-          <ac:spMkLst>
-            <pc:docMk/>
-            <pc:sldMk cId="0" sldId="269"/>
-            <ac:spMk id="22" creationId="{00000000-0000-0000-0000-000000000000}"/>
-          </ac:spMkLst>
-        </pc:spChg>
-        <pc:spChg chg="add del mod">
-          <ac:chgData name="Sowmya R" userId="ad0b4a24c9e9d806" providerId="LiveId" clId="{9B7D84C8-4125-4BEC-91B9-D0DE0E182A68}" dt="2026-10-13T19:59:43.726" v="41"/>
-          <ac:spMkLst>
-            <pc:docMk/>
-            <pc:sldMk cId="0" sldId="269"/>
-            <ac:spMk id="23" creationId="{B7EAE6DA-B90E-D604-09D7-15C7BF84BCE8}"/>
-          </ac:spMkLst>
-        </pc:spChg>
-        <pc:picChg chg="add mod">
-          <ac:chgData name="Sowmya R" userId="ad0b4a24c9e9d806" providerId="LiveId" clId="{9B7D84C8-4125-4BEC-91B9-D0DE0E182A68}" dt="2026-10-13T20:01:47.369" v="64" actId="1076"/>
-          <ac:picMkLst>
-            <pc:docMk/>
-            <pc:sldMk cId="0" sldId="269"/>
-            <ac:picMk id="25" creationId="{92FE0F72-505F-4C27-D444-DDFDAB5DAE54}"/>
-          </ac:picMkLst>
-        </pc:picChg>
-      </pc:sldChg>
-      <pc:sldChg chg="modSp mod">
-        <pc:chgData name="Sowmya R" userId="ad0b4a24c9e9d806" providerId="LiveId" clId="{9B7D84C8-4125-4BEC-91B9-D0DE0E182A68}" dt="2026-10-13T19:43:50.241" v="14" actId="20577"/>
-        <pc:sldMkLst>
-          <pc:docMk/>
-          <pc:sldMk cId="0" sldId="270"/>
-        </pc:sldMkLst>
-        <pc:spChg chg="mod">
-          <ac:chgData name="Sowmya R" userId="ad0b4a24c9e9d806" providerId="LiveId" clId="{9B7D84C8-4125-4BEC-91B9-D0DE0E182A68}" dt="2026-10-13T19:43:50.241" v="14" actId="20577"/>
-          <ac:spMkLst>
-            <pc:docMk/>
-            <pc:sldMk cId="0" sldId="270"/>
-            <ac:spMk id="5" creationId="{00000000-0000-0000-0000-000000000000}"/>
-          </ac:spMkLst>
-        </pc:spChg>
-      </pc:sldChg>
-      <pc:sldChg chg="addSp delSp modSp mod">
-        <pc:chgData name="Sowmya R" userId="ad0b4a24c9e9d806" providerId="LiveId" clId="{9B7D84C8-4125-4BEC-91B9-D0DE0E182A68}" dt="2026-10-13T20:02:50.462" v="65" actId="14100"/>
-        <pc:sldMkLst>
-          <pc:docMk/>
-          <pc:sldMk cId="0" sldId="271"/>
-        </pc:sldMkLst>
-        <pc:spChg chg="mod">
-          <ac:chgData name="Sowmya R" userId="ad0b4a24c9e9d806" providerId="LiveId" clId="{9B7D84C8-4125-4BEC-91B9-D0DE0E182A68}" dt="2026-10-13T19:43:56.546" v="16" actId="20577"/>
-          <ac:spMkLst>
-            <pc:docMk/>
-            <pc:sldMk cId="0" sldId="271"/>
-            <ac:spMk id="5" creationId="{00000000-0000-0000-0000-000000000000}"/>
-          </ac:spMkLst>
-        </pc:spChg>
-        <pc:spChg chg="del">
-          <ac:chgData name="Sowmya R" userId="ad0b4a24c9e9d806" providerId="LiveId" clId="{9B7D84C8-4125-4BEC-91B9-D0DE0E182A68}" dt="2026-10-13T19:50:23.568" v="27" actId="478"/>
-          <ac:spMkLst>
-            <pc:docMk/>
-            <pc:sldMk cId="0" sldId="271"/>
-            <ac:spMk id="46" creationId="{00000000-0000-0000-0000-000000000000}"/>
-          </ac:spMkLst>
-        </pc:spChg>
-        <pc:spChg chg="del">
-          <ac:chgData name="Sowmya R" userId="ad0b4a24c9e9d806" providerId="LiveId" clId="{9B7D84C8-4125-4BEC-91B9-D0DE0E182A68}" dt="2026-10-13T19:50:32.565" v="29" actId="478"/>
-          <ac:spMkLst>
-            <pc:docMk/>
-            <pc:sldMk cId="0" sldId="271"/>
-            <ac:spMk id="47" creationId="{00000000-0000-0000-0000-000000000000}"/>
-          </ac:spMkLst>
-        </pc:spChg>
-        <pc:spChg chg="del">
-          <ac:chgData name="Sowmya R" userId="ad0b4a24c9e9d806" providerId="LiveId" clId="{9B7D84C8-4125-4BEC-91B9-D0DE0E182A68}" dt="2026-10-13T19:50:26.963" v="28" actId="478"/>
-          <ac:spMkLst>
-            <pc:docMk/>
-            <pc:sldMk cId="0" sldId="271"/>
-            <ac:spMk id="48" creationId="{00000000-0000-0000-0000-000000000000}"/>
-          </ac:spMkLst>
-        </pc:spChg>
-        <pc:spChg chg="add del mod">
-          <ac:chgData name="Sowmya R" userId="ad0b4a24c9e9d806" providerId="LiveId" clId="{9B7D84C8-4125-4BEC-91B9-D0DE0E182A68}" dt="2026-10-13T20:00:52.114" v="53" actId="14100"/>
-          <ac:spMkLst>
-            <pc:docMk/>
-            <pc:sldMk cId="0" sldId="271"/>
-            <ac:spMk id="54" creationId="{4397166F-92D0-C777-16FA-96B9D2AC230A}"/>
-          </ac:spMkLst>
-        </pc:spChg>
-        <pc:spChg chg="add del mod">
-          <ac:chgData name="Sowmya R" userId="ad0b4a24c9e9d806" providerId="LiveId" clId="{9B7D84C8-4125-4BEC-91B9-D0DE0E182A68}" dt="2026-10-13T20:00:52.114" v="53" actId="14100"/>
-          <ac:spMkLst>
-            <pc:docMk/>
-            <pc:sldMk cId="0" sldId="271"/>
-            <ac:spMk id="58" creationId="{67C37AB6-2EDB-498E-A51E-708129E75B4D}"/>
-          </ac:spMkLst>
-        </pc:spChg>
-        <pc:spChg chg="add del mod">
-          <ac:chgData name="Sowmya R" userId="ad0b4a24c9e9d806" providerId="LiveId" clId="{9B7D84C8-4125-4BEC-91B9-D0DE0E182A68}" dt="2026-10-13T20:00:52.114" v="53" actId="14100"/>
-          <ac:spMkLst>
-            <pc:docMk/>
-            <pc:sldMk cId="0" sldId="271"/>
-            <ac:spMk id="60" creationId="{D8D17586-A4BB-A59B-33E5-9AECC0F180C8}"/>
-          </ac:spMkLst>
-        </pc:spChg>
-        <pc:spChg chg="add del mod">
-          <ac:chgData name="Sowmya R" userId="ad0b4a24c9e9d806" providerId="LiveId" clId="{9B7D84C8-4125-4BEC-91B9-D0DE0E182A68}" dt="2026-10-13T20:00:52.114" v="53" actId="14100"/>
-          <ac:spMkLst>
-            <pc:docMk/>
-            <pc:sldMk cId="0" sldId="271"/>
-            <ac:spMk id="896" creationId="{AA9C1211-C8AB-ADFC-E705-B6E17058CE78}"/>
-          </ac:spMkLst>
-        </pc:spChg>
-        <pc:spChg chg="add del mod">
-          <ac:chgData name="Sowmya R" userId="ad0b4a24c9e9d806" providerId="LiveId" clId="{9B7D84C8-4125-4BEC-91B9-D0DE0E182A68}" dt="2026-10-13T20:00:52.114" v="53" actId="14100"/>
-          <ac:spMkLst>
-            <pc:docMk/>
-            <pc:sldMk cId="0" sldId="271"/>
-            <ac:spMk id="898" creationId="{D47C45DB-020C-3D9D-05D8-3F5885ABCD9E}"/>
-          </ac:spMkLst>
-        </pc:spChg>
-        <pc:spChg chg="add del mod">
-          <ac:chgData name="Sowmya R" userId="ad0b4a24c9e9d806" providerId="LiveId" clId="{9B7D84C8-4125-4BEC-91B9-D0DE0E182A68}" dt="2026-10-13T20:00:52.114" v="53" actId="14100"/>
-          <ac:spMkLst>
-            <pc:docMk/>
-            <pc:sldMk cId="0" sldId="271"/>
-            <ac:spMk id="900" creationId="{D144E349-24BC-232D-D2C8-1C5A33BC332D}"/>
-          </ac:spMkLst>
-        </pc:spChg>
-        <pc:spChg chg="add del mod">
-          <ac:chgData name="Sowmya R" userId="ad0b4a24c9e9d806" providerId="LiveId" clId="{9B7D84C8-4125-4BEC-91B9-D0DE0E182A68}" dt="2026-10-13T20:00:52.114" v="53" actId="14100"/>
-          <ac:spMkLst>
-            <pc:docMk/>
-            <pc:sldMk cId="0" sldId="271"/>
-            <ac:spMk id="905" creationId="{11F1C996-3A19-3AE0-694B-E12C795ECC86}"/>
-          </ac:spMkLst>
-        </pc:spChg>
-        <pc:spChg chg="mod">
-          <ac:chgData name="Sowmya R" userId="ad0b4a24c9e9d806" providerId="LiveId" clId="{9B7D84C8-4125-4BEC-91B9-D0DE0E182A68}" dt="2026-10-13T20:00:52.114" v="53" actId="14100"/>
-          <ac:spMkLst>
-            <pc:docMk/>
-            <pc:sldMk cId="0" sldId="271"/>
-            <ac:spMk id="907" creationId="{87ABDFD7-C320-FDC3-7371-FE75E4EE4B0C}"/>
-          </ac:spMkLst>
-        </pc:spChg>
-        <pc:spChg chg="add del mod">
-          <ac:chgData name="Sowmya R" userId="ad0b4a24c9e9d806" providerId="LiveId" clId="{9B7D84C8-4125-4BEC-91B9-D0DE0E182A68}" dt="2026-10-13T20:01:14.053" v="57" actId="1076"/>
-          <ac:spMkLst>
-            <pc:docMk/>
-            <pc:sldMk cId="0" sldId="271"/>
-            <ac:spMk id="909" creationId="{2F415355-8328-CAA4-E5E8-31E22344A21D}"/>
-          </ac:spMkLst>
-        </pc:spChg>
-        <pc:spChg chg="add del mod">
-          <ac:chgData name="Sowmya R" userId="ad0b4a24c9e9d806" providerId="LiveId" clId="{9B7D84C8-4125-4BEC-91B9-D0DE0E182A68}" dt="2026-10-13T20:00:39.196" v="52" actId="478"/>
-          <ac:spMkLst>
-            <pc:docMk/>
-            <pc:sldMk cId="0" sldId="271"/>
-            <ac:spMk id="911" creationId="{6519876A-92B2-A94C-0A24-0378730A6D4F}"/>
-          </ac:spMkLst>
-        </pc:spChg>
-        <pc:spChg chg="add del mod">
-          <ac:chgData name="Sowmya R" userId="ad0b4a24c9e9d806" providerId="LiveId" clId="{9B7D84C8-4125-4BEC-91B9-D0DE0E182A68}" dt="2026-10-13T20:02:50.462" v="65" actId="14100"/>
-          <ac:spMkLst>
-            <pc:docMk/>
-            <pc:sldMk cId="0" sldId="271"/>
-            <ac:spMk id="913" creationId="{5563A6C3-B058-BB82-5DFF-4539AAFAA547}"/>
-          </ac:spMkLst>
-        </pc:spChg>
-        <pc:spChg chg="mod">
-          <ac:chgData name="Sowmya R" userId="ad0b4a24c9e9d806" providerId="LiveId" clId="{9B7D84C8-4125-4BEC-91B9-D0DE0E182A68}" dt="2026-10-13T20:01:22.442" v="58" actId="1076"/>
-          <ac:spMkLst>
-            <pc:docMk/>
-            <pc:sldMk cId="0" sldId="271"/>
-            <ac:spMk id="915" creationId="{D528AA8F-4D08-721D-6E1A-237492118FBF}"/>
-          </ac:spMkLst>
-        </pc:spChg>
-        <pc:picChg chg="add del">
-          <ac:chgData name="Sowmya R" userId="ad0b4a24c9e9d806" providerId="LiveId" clId="{9B7D84C8-4125-4BEC-91B9-D0DE0E182A68}" dt="2026-10-13T19:52:14.966" v="32" actId="478"/>
-          <ac:picMkLst>
-            <pc:docMk/>
-            <pc:sldMk cId="0" sldId="271"/>
-            <ac:picMk id="50" creationId="{4CB74BC7-26D5-824A-6958-F27FD4149BA1}"/>
-          </ac:picMkLst>
-        </pc:picChg>
-        <pc:picChg chg="add del mod">
-          <ac:chgData name="Sowmya R" userId="ad0b4a24c9e9d806" providerId="LiveId" clId="{9B7D84C8-4125-4BEC-91B9-D0DE0E182A68}" dt="2026-10-13T19:58:58.004" v="38" actId="22"/>
-          <ac:picMkLst>
-            <pc:docMk/>
-            <pc:sldMk cId="0" sldId="271"/>
-            <ac:picMk id="52" creationId="{C26465A7-7A3A-9050-240A-A5358D516801}"/>
-          </ac:picMkLst>
-        </pc:picChg>
-      </pc:sldChg>
-      <pc:sldChg chg="modSp mod">
-        <pc:chgData name="Sowmya R" userId="ad0b4a24c9e9d806" providerId="LiveId" clId="{9B7D84C8-4125-4BEC-91B9-D0DE0E182A68}" dt="2026-10-13T19:44:00.777" v="18" actId="20577"/>
-        <pc:sldMkLst>
-          <pc:docMk/>
-          <pc:sldMk cId="0" sldId="272"/>
-        </pc:sldMkLst>
-        <pc:spChg chg="mod">
-          <ac:chgData name="Sowmya R" userId="ad0b4a24c9e9d806" providerId="LiveId" clId="{9B7D84C8-4125-4BEC-91B9-D0DE0E182A68}" dt="2026-10-13T19:44:00.777" v="18" actId="20577"/>
-          <ac:spMkLst>
-            <pc:docMk/>
-            <pc:sldMk cId="0" sldId="272"/>
-            <ac:spMk id="5" creationId="{00000000-0000-0000-0000-000000000000}"/>
-          </ac:spMkLst>
-        </pc:spChg>
-      </pc:sldChg>
-      <pc:sldChg chg="modSp mod">
-        <pc:chgData name="Sowmya R" userId="ad0b4a24c9e9d806" providerId="LiveId" clId="{9B7D84C8-4125-4BEC-91B9-D0DE0E182A68}" dt="2026-10-13T19:44:05.319" v="20" actId="20577"/>
-        <pc:sldMkLst>
-          <pc:docMk/>
-          <pc:sldMk cId="0" sldId="273"/>
-        </pc:sldMkLst>
-        <pc:spChg chg="mod">
-          <ac:chgData name="Sowmya R" userId="ad0b4a24c9e9d806" providerId="LiveId" clId="{9B7D84C8-4125-4BEC-91B9-D0DE0E182A68}" dt="2026-10-13T19:44:05.319" v="20" actId="20577"/>
-          <ac:spMkLst>
-            <pc:docMk/>
-            <pc:sldMk cId="0" sldId="273"/>
-            <ac:spMk id="5" creationId="{00000000-0000-0000-0000-000000000000}"/>
-          </ac:spMkLst>
-        </pc:spChg>
-      </pc:sldChg>
-      <pc:sldChg chg="modSp mod">
-        <pc:chgData name="Sowmya R" userId="ad0b4a24c9e9d806" providerId="LiveId" clId="{9B7D84C8-4125-4BEC-91B9-D0DE0E182A68}" dt="2026-10-13T19:44:09.917" v="22" actId="20577"/>
-        <pc:sldMkLst>
-          <pc:docMk/>
-          <pc:sldMk cId="0" sldId="274"/>
-        </pc:sldMkLst>
-        <pc:spChg chg="mod">
-          <ac:chgData name="Sowmya R" userId="ad0b4a24c9e9d806" providerId="LiveId" clId="{9B7D84C8-4125-4BEC-91B9-D0DE0E182A68}" dt="2026-10-13T19:44:09.917" v="22" actId="20577"/>
-          <ac:spMkLst>
-            <pc:docMk/>
-            <pc:sldMk cId="0" sldId="274"/>
-            <ac:spMk id="5" creationId="{00000000-0000-0000-0000-000000000000}"/>
-          </ac:spMkLst>
-        </pc:spChg>
-      </pc:sldChg>
-      <pc:sldChg chg="modSp mod">
-        <pc:chgData name="Sowmya R" userId="ad0b4a24c9e9d806" providerId="LiveId" clId="{9B7D84C8-4125-4BEC-91B9-D0DE0E182A68}" dt="2026-10-13T19:44:15.961" v="24" actId="20577"/>
-        <pc:sldMkLst>
-          <pc:docMk/>
-          <pc:sldMk cId="0" sldId="275"/>
-        </pc:sldMkLst>
-        <pc:spChg chg="mod">
-          <ac:chgData name="Sowmya R" userId="ad0b4a24c9e9d806" providerId="LiveId" clId="{9B7D84C8-4125-4BEC-91B9-D0DE0E182A68}" dt="2026-10-13T19:44:15.961" v="24" actId="20577"/>
-          <ac:spMkLst>
-            <pc:docMk/>
-            <pc:sldMk cId="0" sldId="275"/>
-            <ac:spMk id="5" creationId="{00000000-0000-0000-0000-000000000000}"/>
-          </ac:spMkLst>
-        </pc:spChg>
-      </pc:sldChg>
-      <pc:sldChg chg="modSp mod">
-        <pc:chgData name="Sowmya R" userId="ad0b4a24c9e9d806" providerId="LiveId" clId="{9B7D84C8-4125-4BEC-91B9-D0DE0E182A68}" dt="2026-10-13T19:44:20.813" v="26" actId="20577"/>
-        <pc:sldMkLst>
-          <pc:docMk/>
-          <pc:sldMk cId="0" sldId="276"/>
-        </pc:sldMkLst>
-        <pc:spChg chg="mod">
-          <ac:chgData name="Sowmya R" userId="ad0b4a24c9e9d806" providerId="LiveId" clId="{9B7D84C8-4125-4BEC-91B9-D0DE0E182A68}" dt="2026-10-13T19:44:20.813" v="26" actId="20577"/>
-          <ac:spMkLst>
-            <pc:docMk/>
-            <pc:sldMk cId="0" sldId="276"/>
-            <ac:spMk id="5" creationId="{00000000-0000-0000-0000-000000000000}"/>
-          </ac:spMkLst>
-        </pc:spChg>
-      </pc:sldChg>
-    </pc:docChg>
-  </pc:docChgLst>
-</pc:chgInfo>
 </file>
 
 <file path=ppt/notesMasters/notesMaster1.xml><?xml version="1.0" encoding="utf-8"?>
@@ -8917,10 +8452,10 @@
       </p:pic>
       <p:pic>
         <p:nvPicPr>
-          <p:cNvPr id="25" name="Picture 24">
+          <p:cNvPr id="8" name="Picture 7">
             <a:extLst>
               <a:ext uri="{FF2B5EF4-FFF2-40B4-BE49-F238E27FC236}">
-                <a16:creationId xmlns:a16="http://schemas.microsoft.com/office/drawing/2014/main" id="{92FE0F72-505F-4C27-D444-DDFDAB5DAE54}"/>
+                <a16:creationId xmlns:a16="http://schemas.microsoft.com/office/drawing/2014/main" id="{F6F146A2-F24C-E429-5626-69B995D532EF}"/>
               </a:ext>
             </a:extLst>
           </p:cNvPr>
@@ -8937,8 +8472,8 @@
         </p:blipFill>
         <p:spPr>
           <a:xfrm>
-            <a:off x="365760" y="977686"/>
-            <a:ext cx="5205046" cy="3717890"/>
+            <a:off x="365760" y="1236058"/>
+            <a:ext cx="5210246" cy="3409455"/>
           </a:xfrm>
           <a:prstGeom prst="rect">
             <a:avLst/>
@@ -13293,7 +12828,7 @@
         <p:spPr>
           <a:xfrm>
             <a:off x="438912" y="2528316"/>
-            <a:ext cx="3968496" cy="1783080"/>
+            <a:ext cx="3968496" cy="2450592"/>
           </a:xfrm>
           <a:prstGeom prst="rect">
             <a:avLst/>
@@ -13305,9 +12840,6 @@
           <a:bodyPr wrap="square" lIns="0" tIns="0" rIns="0" bIns="0" rtlCol="0" anchor="t"/>
           <a:lstStyle/>
           <a:p>
-            <a:pPr marL="0" indent="0">
-              <a:buNone/>
-            </a:pPr>
             <a:r>
               <a:rPr lang="en-US" sz="700" dirty="0">
                 <a:solidFill>
@@ -13317,15 +12849,10 @@
                 <a:ea typeface="Consolas" pitchFamily="34" charset="-122"/>
                 <a:cs typeface="Consolas" pitchFamily="34" charset="-120"/>
               </a:rPr>
-              <a:t>1) Node 1: Airport – code(unique) - name</a:t>
-            </a:r>
-          </a:p>
-          <a:p>
-            <a:pPr marL="0" indent="0">
-              <a:buNone/>
-            </a:pPr>
-            <a:r>
-              <a:rPr lang="en-US" sz="700" dirty="0">
+              <a:t>1) Node 1: </a:t>
+            </a:r>
+            <a:r>
+              <a:rPr lang="en-US" sz="700" dirty="0" err="1">
                 <a:solidFill>
                   <a:srgbClr val="2B2B2F"/>
                 </a:solidFill>
@@ -13333,69 +12860,15 @@
                 <a:ea typeface="Consolas" pitchFamily="34" charset="-122"/>
                 <a:cs typeface="Consolas" pitchFamily="34" charset="-120"/>
               </a:rPr>
-              <a:t>CREATE CLASS Airport EXTENDS V;</a:t>
-            </a:r>
-            <a:endParaRPr lang="en-US" sz="700" dirty="0"/>
-          </a:p>
-          <a:p>
-            <a:pPr marL="0" indent="0">
-              <a:buNone/>
-            </a:pPr>
-            <a:r>
-              <a:rPr lang="en-US" sz="700" dirty="0">
-                <a:solidFill>
-                  <a:srgbClr val="2B2B2F"/>
-                </a:solidFill>
-                <a:latin typeface="Consolas" pitchFamily="34" charset="0"/>
-                <a:ea typeface="Consolas" pitchFamily="34" charset="-122"/>
-                <a:cs typeface="Consolas" pitchFamily="34" charset="-120"/>
-              </a:rPr>
-              <a:t>CREATE PROPERTY Airport.code STRING;</a:t>
-            </a:r>
-            <a:endParaRPr lang="en-US" sz="700" dirty="0"/>
-          </a:p>
-          <a:p>
-            <a:pPr marL="0" indent="0">
-              <a:buNone/>
-            </a:pPr>
-            <a:r>
-              <a:rPr lang="en-US" sz="700" dirty="0">
-                <a:solidFill>
-                  <a:srgbClr val="2B2B2F"/>
-                </a:solidFill>
-                <a:latin typeface="Consolas" pitchFamily="34" charset="0"/>
-                <a:ea typeface="Consolas" pitchFamily="34" charset="-122"/>
-                <a:cs typeface="Consolas" pitchFamily="34" charset="-120"/>
-              </a:rPr>
-              <a:t>CREATE PROPERTY Airport.name STRING;</a:t>
-            </a:r>
-            <a:endParaRPr lang="en-US" sz="700" dirty="0"/>
-          </a:p>
-          <a:p>
-            <a:pPr marL="0" indent="0">
-              <a:buNone/>
-            </a:pPr>
-            <a:r>
-              <a:rPr lang="en-US" sz="700" dirty="0">
-                <a:solidFill>
-                  <a:srgbClr val="2B2B2F"/>
-                </a:solidFill>
-                <a:latin typeface="Consolas" pitchFamily="34" charset="0"/>
-                <a:ea typeface="Consolas" pitchFamily="34" charset="-122"/>
-                <a:cs typeface="Consolas" pitchFamily="34" charset="-120"/>
-              </a:rPr>
-              <a:t>CREATE INDEX Airport.code ON Airport(code) UNIQUE;</a:t>
-            </a:r>
-          </a:p>
-          <a:p>
-            <a:pPr marL="0" indent="0">
-              <a:buNone/>
-            </a:pPr>
+              <a:t>AirportNode</a:t>
+            </a:r>
             <a:endParaRPr lang="en-US" sz="700" dirty="0">
               <a:solidFill>
                 <a:srgbClr val="2B2B2F"/>
               </a:solidFill>
               <a:latin typeface="Consolas" pitchFamily="34" charset="0"/>
+              <a:ea typeface="Consolas" pitchFamily="34" charset="-122"/>
+              <a:cs typeface="Consolas" pitchFamily="34" charset="-120"/>
             </a:endParaRPr>
           </a:p>
           <a:p>
@@ -13408,16 +12881,10 @@
                 <a:ea typeface="Consolas" pitchFamily="34" charset="-122"/>
                 <a:cs typeface="Consolas" pitchFamily="34" charset="-120"/>
               </a:rPr>
-              <a:t>2) Node 2: Flight – flight no(unique)</a:t>
-            </a:r>
-            <a:endParaRPr lang="en-US" sz="700" dirty="0"/>
-          </a:p>
-          <a:p>
-            <a:pPr marL="0" indent="0">
-              <a:buNone/>
-            </a:pPr>
-            <a:r>
-              <a:rPr lang="en-US" sz="700" dirty="0">
+              <a:t>CREATE CLASS </a:t>
+            </a:r>
+            <a:r>
+              <a:rPr lang="en-US" sz="700" dirty="0" err="1">
                 <a:solidFill>
                   <a:srgbClr val="2B2B2F"/>
                 </a:solidFill>
@@ -13425,14 +12892,8 @@
                 <a:ea typeface="Consolas" pitchFamily="34" charset="-122"/>
                 <a:cs typeface="Consolas" pitchFamily="34" charset="-120"/>
               </a:rPr>
-              <a:t>CREATE CLASS Flight EXTENDS V;</a:t>
-            </a:r>
-            <a:endParaRPr lang="en-US" sz="700" dirty="0"/>
-          </a:p>
-          <a:p>
-            <a:pPr marL="0" indent="0">
-              <a:buNone/>
-            </a:pPr>
+              <a:t>AirportNode</a:t>
+            </a:r>
             <a:r>
               <a:rPr lang="en-US" sz="700" dirty="0">
                 <a:solidFill>
@@ -13442,14 +12903,10 @@
                 <a:ea typeface="Consolas" pitchFamily="34" charset="-122"/>
                 <a:cs typeface="Consolas" pitchFamily="34" charset="-120"/>
               </a:rPr>
-              <a:t>CREATE PROPERTY Flight.flight_no STRING;</a:t>
-            </a:r>
-            <a:endParaRPr lang="en-US" sz="700" dirty="0"/>
-          </a:p>
-          <a:p>
-            <a:pPr marL="0" indent="0">
-              <a:buNone/>
-            </a:pPr>
+              <a:t> EXTENDS V;</a:t>
+            </a:r>
+          </a:p>
+          <a:p>
             <a:r>
               <a:rPr lang="en-US" sz="700" dirty="0">
                 <a:solidFill>
@@ -13459,39 +12916,112 @@
                 <a:ea typeface="Consolas" pitchFamily="34" charset="-122"/>
                 <a:cs typeface="Consolas" pitchFamily="34" charset="-120"/>
               </a:rPr>
-              <a:t>CREATE INDEX Flight.flight_no ON Flight(flight_no) UNIQUE;</a:t>
-            </a:r>
-          </a:p>
-          <a:p>
-            <a:pPr marL="0" indent="0">
-              <a:buNone/>
-            </a:pPr>
+              <a:t>CREATE PROPERTY </a:t>
+            </a:r>
+            <a:r>
+              <a:rPr lang="en-US" sz="700" dirty="0" err="1">
+                <a:solidFill>
+                  <a:srgbClr val="2B2B2F"/>
+                </a:solidFill>
+                <a:latin typeface="Consolas" pitchFamily="34" charset="0"/>
+                <a:ea typeface="Consolas" pitchFamily="34" charset="-122"/>
+                <a:cs typeface="Consolas" pitchFamily="34" charset="-120"/>
+              </a:rPr>
+              <a:t>AirportNode.code</a:t>
+            </a:r>
+            <a:r>
+              <a:rPr lang="en-US" sz="700" dirty="0">
+                <a:solidFill>
+                  <a:srgbClr val="2B2B2F"/>
+                </a:solidFill>
+                <a:latin typeface="Consolas" pitchFamily="34" charset="0"/>
+                <a:ea typeface="Consolas" pitchFamily="34" charset="-122"/>
+                <a:cs typeface="Consolas" pitchFamily="34" charset="-120"/>
+              </a:rPr>
+              <a:t> STRING;</a:t>
+            </a:r>
+          </a:p>
+          <a:p>
+            <a:r>
+              <a:rPr lang="en-US" sz="700" dirty="0">
+                <a:solidFill>
+                  <a:srgbClr val="2B2B2F"/>
+                </a:solidFill>
+                <a:latin typeface="Consolas" pitchFamily="34" charset="0"/>
+                <a:ea typeface="Consolas" pitchFamily="34" charset="-122"/>
+                <a:cs typeface="Consolas" pitchFamily="34" charset="-120"/>
+              </a:rPr>
+              <a:t>CREATE PROPERTY AirportNode.name STRING;</a:t>
+            </a:r>
+          </a:p>
+          <a:p>
+            <a:r>
+              <a:rPr lang="en-US" sz="700" dirty="0">
+                <a:solidFill>
+                  <a:srgbClr val="2B2B2F"/>
+                </a:solidFill>
+                <a:latin typeface="Consolas" pitchFamily="34" charset="0"/>
+                <a:ea typeface="Consolas" pitchFamily="34" charset="-122"/>
+                <a:cs typeface="Consolas" pitchFamily="34" charset="-120"/>
+              </a:rPr>
+              <a:t>CREATE INDEX </a:t>
+            </a:r>
+            <a:r>
+              <a:rPr lang="en-US" sz="700" dirty="0" err="1">
+                <a:solidFill>
+                  <a:srgbClr val="2B2B2F"/>
+                </a:solidFill>
+                <a:latin typeface="Consolas" pitchFamily="34" charset="0"/>
+                <a:ea typeface="Consolas" pitchFamily="34" charset="-122"/>
+                <a:cs typeface="Consolas" pitchFamily="34" charset="-120"/>
+              </a:rPr>
+              <a:t>AirportNode.code</a:t>
+            </a:r>
+            <a:r>
+              <a:rPr lang="en-US" sz="700" dirty="0">
+                <a:solidFill>
+                  <a:srgbClr val="2B2B2F"/>
+                </a:solidFill>
+                <a:latin typeface="Consolas" pitchFamily="34" charset="0"/>
+                <a:ea typeface="Consolas" pitchFamily="34" charset="-122"/>
+                <a:cs typeface="Consolas" pitchFamily="34" charset="-120"/>
+              </a:rPr>
+              <a:t> ON </a:t>
+            </a:r>
+            <a:r>
+              <a:rPr lang="en-US" sz="700" dirty="0" err="1">
+                <a:solidFill>
+                  <a:srgbClr val="2B2B2F"/>
+                </a:solidFill>
+                <a:latin typeface="Consolas" pitchFamily="34" charset="0"/>
+                <a:ea typeface="Consolas" pitchFamily="34" charset="-122"/>
+                <a:cs typeface="Consolas" pitchFamily="34" charset="-120"/>
+              </a:rPr>
+              <a:t>AirportNode</a:t>
+            </a:r>
+            <a:r>
+              <a:rPr lang="en-US" sz="700" dirty="0">
+                <a:solidFill>
+                  <a:srgbClr val="2B2B2F"/>
+                </a:solidFill>
+                <a:latin typeface="Consolas" pitchFamily="34" charset="0"/>
+                <a:ea typeface="Consolas" pitchFamily="34" charset="-122"/>
+                <a:cs typeface="Consolas" pitchFamily="34" charset="-120"/>
+              </a:rPr>
+              <a:t>(code) UNIQUE;</a:t>
+            </a:r>
+          </a:p>
+          <a:p>
             <a:endParaRPr lang="en-US" sz="700" dirty="0">
               <a:solidFill>
                 <a:srgbClr val="2B2B2F"/>
               </a:solidFill>
               <a:latin typeface="Consolas" pitchFamily="34" charset="0"/>
+              <a:ea typeface="Consolas" pitchFamily="34" charset="-122"/>
+              <a:cs typeface="Consolas" pitchFamily="34" charset="-120"/>
             </a:endParaRPr>
           </a:p>
           <a:p>
-            <a:pPr marL="0" indent="0">
-              <a:buNone/>
-            </a:pPr>
-            <a:r>
-              <a:rPr lang="en-US" sz="700" dirty="0">
-                <a:solidFill>
-                  <a:srgbClr val="2B2B2F"/>
-                </a:solidFill>
-                <a:latin typeface="Consolas" pitchFamily="34" charset="0"/>
-              </a:rPr>
-              <a:t>3)Node 3: Passenger</a:t>
-            </a:r>
-            <a:endParaRPr lang="en-US" sz="700" dirty="0"/>
-          </a:p>
-          <a:p>
-            <a:pPr marL="0" indent="0">
-              <a:buNone/>
-            </a:pPr>
             <a:r>
               <a:rPr lang="en-US" sz="700" dirty="0">
                 <a:solidFill>
@@ -13501,39 +13031,125 @@
                 <a:ea typeface="Consolas" pitchFamily="34" charset="-122"/>
                 <a:cs typeface="Consolas" pitchFamily="34" charset="-120"/>
               </a:rPr>
-              <a:t>CREATE CLASS Passenger EXTENDS V;</a:t>
-            </a:r>
-          </a:p>
-          <a:p>
-            <a:pPr marL="0" indent="0">
-              <a:buNone/>
-            </a:pPr>
+              <a:t>2) Node 2: Flight</a:t>
+            </a:r>
+          </a:p>
+          <a:p>
+            <a:r>
+              <a:rPr lang="en-US" sz="700" dirty="0">
+                <a:solidFill>
+                  <a:srgbClr val="2B2B2F"/>
+                </a:solidFill>
+                <a:latin typeface="Consolas" pitchFamily="34" charset="0"/>
+                <a:ea typeface="Consolas" pitchFamily="34" charset="-122"/>
+                <a:cs typeface="Consolas" pitchFamily="34" charset="-120"/>
+              </a:rPr>
+              <a:t>CREATE CLASS Flight EXTENDS V;</a:t>
+            </a:r>
+          </a:p>
+          <a:p>
+            <a:r>
+              <a:rPr lang="en-US" sz="700" dirty="0">
+                <a:solidFill>
+                  <a:srgbClr val="2B2B2F"/>
+                </a:solidFill>
+                <a:latin typeface="Consolas" pitchFamily="34" charset="0"/>
+                <a:ea typeface="Consolas" pitchFamily="34" charset="-122"/>
+                <a:cs typeface="Consolas" pitchFamily="34" charset="-120"/>
+              </a:rPr>
+              <a:t>CREATE PROPERTY </a:t>
+            </a:r>
+            <a:r>
+              <a:rPr lang="en-US" sz="700" dirty="0" err="1">
+                <a:solidFill>
+                  <a:srgbClr val="2B2B2F"/>
+                </a:solidFill>
+                <a:latin typeface="Consolas" pitchFamily="34" charset="0"/>
+                <a:ea typeface="Consolas" pitchFamily="34" charset="-122"/>
+                <a:cs typeface="Consolas" pitchFamily="34" charset="-120"/>
+              </a:rPr>
+              <a:t>Flight.flight_no</a:t>
+            </a:r>
+            <a:r>
+              <a:rPr lang="en-US" sz="700" dirty="0">
+                <a:solidFill>
+                  <a:srgbClr val="2B2B2F"/>
+                </a:solidFill>
+                <a:latin typeface="Consolas" pitchFamily="34" charset="0"/>
+                <a:ea typeface="Consolas" pitchFamily="34" charset="-122"/>
+                <a:cs typeface="Consolas" pitchFamily="34" charset="-120"/>
+              </a:rPr>
+              <a:t> STRING;</a:t>
+            </a:r>
+          </a:p>
+          <a:p>
+            <a:r>
+              <a:rPr lang="en-US" sz="700" dirty="0">
+                <a:solidFill>
+                  <a:srgbClr val="2B2B2F"/>
+                </a:solidFill>
+                <a:latin typeface="Consolas" pitchFamily="34" charset="0"/>
+                <a:ea typeface="Consolas" pitchFamily="34" charset="-122"/>
+                <a:cs typeface="Consolas" pitchFamily="34" charset="-120"/>
+              </a:rPr>
+              <a:t>CREATE INDEX </a:t>
+            </a:r>
+            <a:r>
+              <a:rPr lang="en-US" sz="700" dirty="0" err="1">
+                <a:solidFill>
+                  <a:srgbClr val="2B2B2F"/>
+                </a:solidFill>
+                <a:latin typeface="Consolas" pitchFamily="34" charset="0"/>
+                <a:ea typeface="Consolas" pitchFamily="34" charset="-122"/>
+                <a:cs typeface="Consolas" pitchFamily="34" charset="-120"/>
+              </a:rPr>
+              <a:t>Flight.flight_no</a:t>
+            </a:r>
+            <a:r>
+              <a:rPr lang="en-US" sz="700" dirty="0">
+                <a:solidFill>
+                  <a:srgbClr val="2B2B2F"/>
+                </a:solidFill>
+                <a:latin typeface="Consolas" pitchFamily="34" charset="0"/>
+                <a:ea typeface="Consolas" pitchFamily="34" charset="-122"/>
+                <a:cs typeface="Consolas" pitchFamily="34" charset="-120"/>
+              </a:rPr>
+              <a:t> ON Flight(</a:t>
+            </a:r>
+            <a:r>
+              <a:rPr lang="en-US" sz="700" dirty="0" err="1">
+                <a:solidFill>
+                  <a:srgbClr val="2B2B2F"/>
+                </a:solidFill>
+                <a:latin typeface="Consolas" pitchFamily="34" charset="0"/>
+                <a:ea typeface="Consolas" pitchFamily="34" charset="-122"/>
+                <a:cs typeface="Consolas" pitchFamily="34" charset="-120"/>
+              </a:rPr>
+              <a:t>flight_no</a:t>
+            </a:r>
+            <a:r>
+              <a:rPr lang="en-US" sz="700" dirty="0">
+                <a:solidFill>
+                  <a:srgbClr val="2B2B2F"/>
+                </a:solidFill>
+                <a:latin typeface="Consolas" pitchFamily="34" charset="0"/>
+                <a:ea typeface="Consolas" pitchFamily="34" charset="-122"/>
+                <a:cs typeface="Consolas" pitchFamily="34" charset="-120"/>
+              </a:rPr>
+              <a:t>) UNIQUE;</a:t>
+            </a:r>
+          </a:p>
+          <a:p>
             <a:endParaRPr lang="en-US" sz="700" dirty="0">
               <a:solidFill>
                 <a:srgbClr val="2B2B2F"/>
               </a:solidFill>
               <a:latin typeface="Consolas" pitchFamily="34" charset="0"/>
+              <a:ea typeface="Consolas" pitchFamily="34" charset="-122"/>
+              <a:cs typeface="Consolas" pitchFamily="34" charset="-120"/>
             </a:endParaRPr>
           </a:p>
           <a:p>
-            <a:pPr marL="0" indent="0">
-              <a:buNone/>
-            </a:pPr>
-            <a:r>
-              <a:rPr lang="en-US" sz="700" dirty="0">
-                <a:solidFill>
-                  <a:srgbClr val="2B2B2F"/>
-                </a:solidFill>
-                <a:latin typeface="Consolas" pitchFamily="34" charset="0"/>
-              </a:rPr>
-              <a:t>4)Edges</a:t>
-            </a:r>
-            <a:endParaRPr lang="en-US" sz="700" dirty="0"/>
-          </a:p>
-          <a:p>
-            <a:pPr marL="0" indent="0">
-              <a:buNone/>
-            </a:pPr>
             <a:r>
               <a:rPr lang="en-US" sz="700" dirty="0">
                 <a:solidFill>
@@ -13543,14 +13159,10 @@
                 <a:ea typeface="Consolas" pitchFamily="34" charset="-122"/>
                 <a:cs typeface="Consolas" pitchFamily="34" charset="-120"/>
               </a:rPr>
-              <a:t>CREATE CLASS Departs EXTENDS E;</a:t>
-            </a:r>
-            <a:endParaRPr lang="en-US" sz="700" dirty="0"/>
-          </a:p>
-          <a:p>
-            <a:pPr marL="0" indent="0">
-              <a:buNone/>
-            </a:pPr>
+              <a:t>3) Node 3: Passenger                </a:t>
+            </a:r>
+          </a:p>
+          <a:p>
             <a:r>
               <a:rPr lang="en-US" sz="700" dirty="0">
                 <a:solidFill>
@@ -13560,14 +13172,20 @@
                 <a:ea typeface="Consolas" pitchFamily="34" charset="-122"/>
                 <a:cs typeface="Consolas" pitchFamily="34" charset="-120"/>
               </a:rPr>
-              <a:t>CREATE CLASS Arrives EXTENDS E;</a:t>
-            </a:r>
-            <a:endParaRPr lang="en-US" sz="700" dirty="0"/>
-          </a:p>
-          <a:p>
-            <a:pPr marL="0" indent="0">
-              <a:buNone/>
-            </a:pPr>
+              <a:t>CREATE CLASS Passenger EXTENDS V;</a:t>
+            </a:r>
+          </a:p>
+          <a:p>
+            <a:endParaRPr lang="en-US" sz="700" dirty="0">
+              <a:solidFill>
+                <a:srgbClr val="2B2B2F"/>
+              </a:solidFill>
+              <a:latin typeface="Consolas" pitchFamily="34" charset="0"/>
+              <a:ea typeface="Consolas" pitchFamily="34" charset="-122"/>
+              <a:cs typeface="Consolas" pitchFamily="34" charset="-120"/>
+            </a:endParaRPr>
+          </a:p>
+          <a:p>
             <a:r>
               <a:rPr lang="en-US" sz="700" dirty="0">
                 <a:solidFill>
@@ -13577,7 +13195,20 @@
                 <a:ea typeface="Consolas" pitchFamily="34" charset="-122"/>
                 <a:cs typeface="Consolas" pitchFamily="34" charset="-120"/>
               </a:rPr>
-              <a:t>CREATE CLASS Booked EXTENDS E;</a:t>
+              <a:t>4) Node 4: Booking</a:t>
+            </a:r>
+          </a:p>
+          <a:p>
+            <a:r>
+              <a:rPr lang="en-US" sz="700" dirty="0">
+                <a:solidFill>
+                  <a:srgbClr val="2B2B2F"/>
+                </a:solidFill>
+                <a:latin typeface="Consolas" pitchFamily="34" charset="0"/>
+                <a:ea typeface="Consolas" pitchFamily="34" charset="-122"/>
+                <a:cs typeface="Consolas" pitchFamily="34" charset="-120"/>
+              </a:rPr>
+              <a:t>CREATE CLASS Booking EXTENDS V;	</a:t>
             </a:r>
             <a:endParaRPr lang="en-US" sz="700" dirty="0"/>
           </a:p>
@@ -13655,8 +13286,8 @@
         </p:nvSpPr>
         <p:spPr>
           <a:xfrm>
-            <a:off x="4736592" y="2569464"/>
-            <a:ext cx="3968496" cy="1783080"/>
+            <a:off x="4736592" y="2528315"/>
+            <a:ext cx="3968496" cy="1987689"/>
           </a:xfrm>
           <a:prstGeom prst="rect">
             <a:avLst/>
@@ -13668,9 +13299,6 @@
           <a:bodyPr wrap="square" lIns="0" tIns="0" rIns="0" bIns="0" rtlCol="0" anchor="t"/>
           <a:lstStyle/>
           <a:p>
-            <a:pPr marL="0" indent="0">
-              <a:buNone/>
-            </a:pPr>
             <a:r>
               <a:rPr lang="en-US" sz="700" dirty="0">
                 <a:solidFill>
@@ -13680,13 +13308,10 @@
                 <a:ea typeface="Consolas" pitchFamily="34" charset="-122"/>
                 <a:cs typeface="Consolas" pitchFamily="34" charset="-120"/>
               </a:rPr>
-              <a:t>1) Insert data</a:t>
-            </a:r>
-          </a:p>
-          <a:p>
-            <a:pPr marL="0" indent="0">
-              <a:buNone/>
-            </a:pPr>
+              <a:t>-1) Insert data</a:t>
+            </a:r>
+          </a:p>
+          <a:p>
             <a:r>
               <a:rPr lang="en-US" sz="700" dirty="0">
                 <a:solidFill>
@@ -13696,16 +13321,10 @@
                 <a:ea typeface="Consolas" pitchFamily="34" charset="-122"/>
                 <a:cs typeface="Consolas" pitchFamily="34" charset="-120"/>
               </a:rPr>
-              <a:t>CREATE VERTEX Airport SET code='MAA’,</a:t>
-            </a:r>
-            <a:r>
-              <a:rPr lang="en-US" sz="700" dirty="0">
-                <a:latin typeface="Consolas" panose="020B0609020204030204" pitchFamily="49" charset="0"/>
-              </a:rPr>
-              <a:t> </a:t>
-            </a:r>
-            <a:r>
-              <a:rPr lang="en-US" sz="700" dirty="0">
+              <a:t>CREATE VERTEX </a:t>
+            </a:r>
+            <a:r>
+              <a:rPr lang="en-US" sz="700" dirty="0" err="1">
                 <a:solidFill>
                   <a:srgbClr val="2B2B2F"/>
                 </a:solidFill>
@@ -13713,16 +13332,8 @@
                 <a:ea typeface="Consolas" pitchFamily="34" charset="-122"/>
                 <a:cs typeface="Consolas" pitchFamily="34" charset="-120"/>
               </a:rPr>
-              <a:t>name='Chennai Intl', city='Chennai';</a:t>
-            </a:r>
-            <a:endParaRPr lang="en-US" sz="700" dirty="0">
-              <a:latin typeface="Consolas" panose="020B0609020204030204" pitchFamily="49" charset="0"/>
-            </a:endParaRPr>
-          </a:p>
-          <a:p>
-            <a:pPr marL="0" indent="0">
-              <a:buNone/>
-            </a:pPr>
+              <a:t>AirportNode</a:t>
+            </a:r>
             <a:r>
               <a:rPr lang="en-US" sz="700" dirty="0">
                 <a:solidFill>
@@ -13732,14 +13343,10 @@
                 <a:ea typeface="Consolas" pitchFamily="34" charset="-122"/>
                 <a:cs typeface="Consolas" pitchFamily="34" charset="-120"/>
               </a:rPr>
-              <a:t>CREATE VERTEX Airport SET code='DEL’,</a:t>
-            </a:r>
-            <a:r>
-              <a:rPr lang="en-US" sz="700" dirty="0">
-                <a:latin typeface="Consolas" panose="020B0609020204030204" pitchFamily="49" charset="0"/>
-              </a:rPr>
-              <a:t> </a:t>
-            </a:r>
+              <a:t> SET code = 'MAA', name = 'Chennai Intl', city = 'Chennai';</a:t>
+            </a:r>
+          </a:p>
+          <a:p>
             <a:r>
               <a:rPr lang="en-US" sz="700" dirty="0">
                 <a:solidFill>
@@ -13749,23 +13356,10 @@
                 <a:ea typeface="Consolas" pitchFamily="34" charset="-122"/>
                 <a:cs typeface="Consolas" pitchFamily="34" charset="-120"/>
               </a:rPr>
-              <a:t>name='Delhi Intl', city='Delhi’;</a:t>
-            </a:r>
-          </a:p>
-          <a:p>
-            <a:pPr marL="0" indent="0">
-              <a:buNone/>
-            </a:pPr>
-            <a:endParaRPr lang="en-US" sz="700" dirty="0">
-              <a:latin typeface="Consolas" panose="020B0609020204030204" pitchFamily="49" charset="0"/>
-            </a:endParaRPr>
-          </a:p>
-          <a:p>
-            <a:pPr marL="0" indent="0">
-              <a:buNone/>
-            </a:pPr>
-            <a:r>
-              <a:rPr lang="en-US" sz="700" dirty="0">
+              <a:t>CREATE VERTEX </a:t>
+            </a:r>
+            <a:r>
+              <a:rPr lang="en-US" sz="700" dirty="0" err="1">
                 <a:solidFill>
                   <a:srgbClr val="2B2B2F"/>
                 </a:solidFill>
@@ -13773,13 +13367,7 @@
                 <a:ea typeface="Consolas" pitchFamily="34" charset="-122"/>
                 <a:cs typeface="Consolas" pitchFamily="34" charset="-120"/>
               </a:rPr>
-              <a:t>CREATE VERTEX Flight SET flight_no='AI101’,</a:t>
-            </a:r>
-            <a:r>
-              <a:rPr lang="en-US" sz="700" dirty="0">
-                <a:latin typeface="Consolas" panose="020B0609020204030204" pitchFamily="49" charset="0"/>
-              </a:rPr>
-              <a:t> </a:t>
+              <a:t>AirportNode</a:t>
             </a:r>
             <a:r>
               <a:rPr lang="en-US" sz="700" dirty="0">
@@ -13790,83 +13378,10 @@
                 <a:ea typeface="Consolas" pitchFamily="34" charset="-122"/>
                 <a:cs typeface="Consolas" pitchFamily="34" charset="-120"/>
               </a:rPr>
-              <a:t>seats=180, fare=5200;</a:t>
-            </a:r>
-          </a:p>
-          <a:p>
-            <a:pPr marL="0" indent="0">
-              <a:buNone/>
-            </a:pPr>
-            <a:endParaRPr lang="en-US" sz="700" dirty="0">
-              <a:latin typeface="Consolas" panose="020B0609020204030204" pitchFamily="49" charset="0"/>
-            </a:endParaRPr>
-          </a:p>
-          <a:p>
-            <a:r>
-              <a:rPr lang="en-US" sz="700" dirty="0">
-                <a:latin typeface="Consolas" panose="020B0609020204030204" pitchFamily="49" charset="0"/>
-              </a:rPr>
-              <a:t>2) Chennai Airport → Departs → AI101</a:t>
-            </a:r>
-          </a:p>
-          <a:p>
-            <a:pPr marL="0" indent="0">
-              <a:buNone/>
-            </a:pPr>
-            <a:r>
-              <a:rPr lang="en-US" sz="700" dirty="0">
-                <a:solidFill>
-                  <a:srgbClr val="2B2B2F"/>
-                </a:solidFill>
-                <a:latin typeface="Consolas" panose="020B0609020204030204" pitchFamily="49" charset="0"/>
-                <a:ea typeface="Consolas" pitchFamily="34" charset="-122"/>
-                <a:cs typeface="Consolas" pitchFamily="34" charset="-120"/>
-              </a:rPr>
-              <a:t>CREATE EDGE Departs FROM</a:t>
-            </a:r>
-            <a:endParaRPr lang="en-US" sz="700" dirty="0">
-              <a:latin typeface="Consolas" panose="020B0609020204030204" pitchFamily="49" charset="0"/>
-            </a:endParaRPr>
-          </a:p>
-          <a:p>
-            <a:pPr marL="0" indent="0">
-              <a:buNone/>
-            </a:pPr>
-            <a:r>
-              <a:rPr lang="en-US" sz="700" dirty="0">
-                <a:solidFill>
-                  <a:srgbClr val="2B2B2F"/>
-                </a:solidFill>
-                <a:latin typeface="Consolas" panose="020B0609020204030204" pitchFamily="49" charset="0"/>
-                <a:ea typeface="Consolas" pitchFamily="34" charset="-122"/>
-                <a:cs typeface="Consolas" pitchFamily="34" charset="-120"/>
-              </a:rPr>
-              <a:t>(SELECT FROM Airport WHERE code='MAA') TO</a:t>
-            </a:r>
-            <a:endParaRPr lang="en-US" sz="700" dirty="0">
-              <a:latin typeface="Consolas" panose="020B0609020204030204" pitchFamily="49" charset="0"/>
-            </a:endParaRPr>
-          </a:p>
-          <a:p>
-            <a:pPr marL="0" indent="0">
-              <a:buNone/>
-            </a:pPr>
-            <a:r>
-              <a:rPr lang="en-US" sz="700" dirty="0">
-                <a:solidFill>
-                  <a:srgbClr val="2B2B2F"/>
-                </a:solidFill>
-                <a:latin typeface="Consolas" panose="020B0609020204030204" pitchFamily="49" charset="0"/>
-                <a:ea typeface="Consolas" pitchFamily="34" charset="-122"/>
-                <a:cs typeface="Consolas" pitchFamily="34" charset="-120"/>
-              </a:rPr>
-              <a:t>(SELECT FROM Flight WHERE flight_no='AI101’);</a:t>
-            </a:r>
-          </a:p>
-          <a:p>
-            <a:pPr marL="0" indent="0">
-              <a:buNone/>
-            </a:pPr>
+              <a:t> SET code = 'DEL', name = 'Delhi Intl', city = 'Delhi';</a:t>
+            </a:r>
+          </a:p>
+          <a:p>
             <a:endParaRPr lang="en-US" sz="700" dirty="0">
               <a:solidFill>
                 <a:srgbClr val="2B2B2F"/>
@@ -13883,22 +13398,13 @@
                   <a:srgbClr val="2B2B2F"/>
                 </a:solidFill>
                 <a:latin typeface="Consolas" panose="020B0609020204030204" pitchFamily="49" charset="0"/>
-              </a:rPr>
-              <a:t>3)</a:t>
-            </a:r>
-            <a:r>
-              <a:rPr lang="en-US" sz="700" dirty="0">
-                <a:latin typeface="Consolas" panose="020B0609020204030204" pitchFamily="49" charset="0"/>
-              </a:rPr>
-              <a:t> AI101 → Arrives → Delhi Airport</a:t>
-            </a:r>
-          </a:p>
-          <a:p>
-            <a:pPr marL="0" indent="0">
-              <a:buNone/>
-            </a:pPr>
-            <a:r>
-              <a:rPr lang="en-US" sz="700" dirty="0">
+                <a:ea typeface="Consolas" pitchFamily="34" charset="-122"/>
+                <a:cs typeface="Consolas" pitchFamily="34" charset="-120"/>
+              </a:rPr>
+              <a:t>CREATE VERTEX Flight SET </a:t>
+            </a:r>
+            <a:r>
+              <a:rPr lang="en-US" sz="700" dirty="0" err="1">
                 <a:solidFill>
                   <a:srgbClr val="2B2B2F"/>
                 </a:solidFill>
@@ -13906,16 +13412,8 @@
                 <a:ea typeface="Consolas" pitchFamily="34" charset="-122"/>
                 <a:cs typeface="Consolas" pitchFamily="34" charset="-120"/>
               </a:rPr>
-              <a:t>CREATE EDGE Arrives FROM</a:t>
-            </a:r>
-            <a:endParaRPr lang="en-US" sz="700" dirty="0">
-              <a:latin typeface="Consolas" panose="020B0609020204030204" pitchFamily="49" charset="0"/>
-            </a:endParaRPr>
-          </a:p>
-          <a:p>
-            <a:pPr marL="0" indent="0">
-              <a:buNone/>
-            </a:pPr>
+              <a:t>flight_no</a:t>
+            </a:r>
             <a:r>
               <a:rPr lang="en-US" sz="700" dirty="0">
                 <a:solidFill>
@@ -13925,16 +13423,30 @@
                 <a:ea typeface="Consolas" pitchFamily="34" charset="-122"/>
                 <a:cs typeface="Consolas" pitchFamily="34" charset="-120"/>
               </a:rPr>
-              <a:t>(SELECT FROM Flight WHERE flight_no='AI101') TO</a:t>
-            </a:r>
+              <a:t> = 'AI101', seats = 180, fare = 5200;</a:t>
+            </a:r>
+          </a:p>
+          <a:p>
             <a:endParaRPr lang="en-US" sz="700" dirty="0">
+              <a:solidFill>
+                <a:srgbClr val="2B2B2F"/>
+              </a:solidFill>
               <a:latin typeface="Consolas" panose="020B0609020204030204" pitchFamily="49" charset="0"/>
+              <a:ea typeface="Consolas" pitchFamily="34" charset="-122"/>
+              <a:cs typeface="Consolas" pitchFamily="34" charset="-120"/>
             </a:endParaRPr>
           </a:p>
           <a:p>
-            <a:pPr marL="0" indent="0">
-              <a:buNone/>
-            </a:pPr>
+            <a:endParaRPr lang="en-US" sz="700" dirty="0">
+              <a:solidFill>
+                <a:srgbClr val="2B2B2F"/>
+              </a:solidFill>
+              <a:latin typeface="Consolas" panose="020B0609020204030204" pitchFamily="49" charset="0"/>
+              <a:ea typeface="Consolas" pitchFamily="34" charset="-122"/>
+              <a:cs typeface="Consolas" pitchFamily="34" charset="-120"/>
+            </a:endParaRPr>
+          </a:p>
+          <a:p>
             <a:r>
               <a:rPr lang="en-US" sz="700" dirty="0">
                 <a:solidFill>
@@ -13944,7 +13456,294 @@
                 <a:ea typeface="Consolas" pitchFamily="34" charset="-122"/>
                 <a:cs typeface="Consolas" pitchFamily="34" charset="-120"/>
               </a:rPr>
-              <a:t>(SELECT FROM Airport WHERE code='DEL');</a:t>
+              <a:t>-2) Chennai Airport → </a:t>
+            </a:r>
+            <a:r>
+              <a:rPr lang="en-US" sz="700" dirty="0" err="1">
+                <a:solidFill>
+                  <a:srgbClr val="2B2B2F"/>
+                </a:solidFill>
+                <a:latin typeface="Consolas" panose="020B0609020204030204" pitchFamily="49" charset="0"/>
+                <a:ea typeface="Consolas" pitchFamily="34" charset="-122"/>
+                <a:cs typeface="Consolas" pitchFamily="34" charset="-120"/>
+              </a:rPr>
+              <a:t>DepartsFrom</a:t>
+            </a:r>
+            <a:r>
+              <a:rPr lang="en-US" sz="700" dirty="0">
+                <a:solidFill>
+                  <a:srgbClr val="2B2B2F"/>
+                </a:solidFill>
+                <a:latin typeface="Consolas" panose="020B0609020204030204" pitchFamily="49" charset="0"/>
+                <a:ea typeface="Consolas" pitchFamily="34" charset="-122"/>
+                <a:cs typeface="Consolas" pitchFamily="34" charset="-120"/>
+              </a:rPr>
+              <a:t> → AI101</a:t>
+            </a:r>
+          </a:p>
+          <a:p>
+            <a:r>
+              <a:rPr lang="en-US" sz="700" dirty="0">
+                <a:solidFill>
+                  <a:srgbClr val="2B2B2F"/>
+                </a:solidFill>
+                <a:latin typeface="Consolas" panose="020B0609020204030204" pitchFamily="49" charset="0"/>
+                <a:ea typeface="Consolas" pitchFamily="34" charset="-122"/>
+                <a:cs typeface="Consolas" pitchFamily="34" charset="-120"/>
+              </a:rPr>
+              <a:t>CREATE EDGE </a:t>
+            </a:r>
+            <a:r>
+              <a:rPr lang="en-US" sz="700" dirty="0" err="1">
+                <a:solidFill>
+                  <a:srgbClr val="2B2B2F"/>
+                </a:solidFill>
+                <a:latin typeface="Consolas" panose="020B0609020204030204" pitchFamily="49" charset="0"/>
+                <a:ea typeface="Consolas" pitchFamily="34" charset="-122"/>
+                <a:cs typeface="Consolas" pitchFamily="34" charset="-120"/>
+              </a:rPr>
+              <a:t>DepartsFrom</a:t>
+            </a:r>
+            <a:r>
+              <a:rPr lang="en-US" sz="700" dirty="0">
+                <a:solidFill>
+                  <a:srgbClr val="2B2B2F"/>
+                </a:solidFill>
+                <a:latin typeface="Consolas" panose="020B0609020204030204" pitchFamily="49" charset="0"/>
+                <a:ea typeface="Consolas" pitchFamily="34" charset="-122"/>
+                <a:cs typeface="Consolas" pitchFamily="34" charset="-120"/>
+              </a:rPr>
+              <a:t> FROM</a:t>
+            </a:r>
+          </a:p>
+          <a:p>
+            <a:r>
+              <a:rPr lang="en-US" sz="700" dirty="0">
+                <a:solidFill>
+                  <a:srgbClr val="2B2B2F"/>
+                </a:solidFill>
+                <a:latin typeface="Consolas" panose="020B0609020204030204" pitchFamily="49" charset="0"/>
+                <a:ea typeface="Consolas" pitchFamily="34" charset="-122"/>
+                <a:cs typeface="Consolas" pitchFamily="34" charset="-120"/>
+              </a:rPr>
+              <a:t>(SELECT FROM </a:t>
+            </a:r>
+            <a:r>
+              <a:rPr lang="en-US" sz="700" dirty="0" err="1">
+                <a:solidFill>
+                  <a:srgbClr val="2B2B2F"/>
+                </a:solidFill>
+                <a:latin typeface="Consolas" panose="020B0609020204030204" pitchFamily="49" charset="0"/>
+                <a:ea typeface="Consolas" pitchFamily="34" charset="-122"/>
+                <a:cs typeface="Consolas" pitchFamily="34" charset="-120"/>
+              </a:rPr>
+              <a:t>AirportNode</a:t>
+            </a:r>
+            <a:r>
+              <a:rPr lang="en-US" sz="700" dirty="0">
+                <a:solidFill>
+                  <a:srgbClr val="2B2B2F"/>
+                </a:solidFill>
+                <a:latin typeface="Consolas" panose="020B0609020204030204" pitchFamily="49" charset="0"/>
+                <a:ea typeface="Consolas" pitchFamily="34" charset="-122"/>
+                <a:cs typeface="Consolas" pitchFamily="34" charset="-120"/>
+              </a:rPr>
+              <a:t> WHERE code = 'MAA’) TO</a:t>
+            </a:r>
+          </a:p>
+          <a:p>
+            <a:r>
+              <a:rPr lang="en-US" sz="700" dirty="0">
+                <a:solidFill>
+                  <a:srgbClr val="2B2B2F"/>
+                </a:solidFill>
+                <a:latin typeface="Consolas" panose="020B0609020204030204" pitchFamily="49" charset="0"/>
+                <a:ea typeface="Consolas" pitchFamily="34" charset="-122"/>
+                <a:cs typeface="Consolas" pitchFamily="34" charset="-120"/>
+              </a:rPr>
+              <a:t>(SELECT FROM Flight WHERE </a:t>
+            </a:r>
+            <a:r>
+              <a:rPr lang="en-US" sz="700" dirty="0" err="1">
+                <a:solidFill>
+                  <a:srgbClr val="2B2B2F"/>
+                </a:solidFill>
+                <a:latin typeface="Consolas" panose="020B0609020204030204" pitchFamily="49" charset="0"/>
+                <a:ea typeface="Consolas" pitchFamily="34" charset="-122"/>
+                <a:cs typeface="Consolas" pitchFamily="34" charset="-120"/>
+              </a:rPr>
+              <a:t>flight_no</a:t>
+            </a:r>
+            <a:r>
+              <a:rPr lang="en-US" sz="700" dirty="0">
+                <a:solidFill>
+                  <a:srgbClr val="2B2B2F"/>
+                </a:solidFill>
+                <a:latin typeface="Consolas" panose="020B0609020204030204" pitchFamily="49" charset="0"/>
+                <a:ea typeface="Consolas" pitchFamily="34" charset="-122"/>
+                <a:cs typeface="Consolas" pitchFamily="34" charset="-120"/>
+              </a:rPr>
+              <a:t> = 'AI101');</a:t>
+            </a:r>
+          </a:p>
+          <a:p>
+            <a:endParaRPr lang="en-US" sz="700" dirty="0">
+              <a:solidFill>
+                <a:srgbClr val="2B2B2F"/>
+              </a:solidFill>
+              <a:latin typeface="Consolas" panose="020B0609020204030204" pitchFamily="49" charset="0"/>
+              <a:ea typeface="Consolas" pitchFamily="34" charset="-122"/>
+              <a:cs typeface="Consolas" pitchFamily="34" charset="-120"/>
+            </a:endParaRPr>
+          </a:p>
+          <a:p>
+            <a:r>
+              <a:rPr lang="en-US" sz="700" dirty="0">
+                <a:solidFill>
+                  <a:srgbClr val="2B2B2F"/>
+                </a:solidFill>
+                <a:latin typeface="Consolas" panose="020B0609020204030204" pitchFamily="49" charset="0"/>
+                <a:ea typeface="Consolas" pitchFamily="34" charset="-122"/>
+                <a:cs typeface="Consolas" pitchFamily="34" charset="-120"/>
+              </a:rPr>
+              <a:t>3) AI101 → </a:t>
+            </a:r>
+            <a:r>
+              <a:rPr lang="en-US" sz="700" dirty="0" err="1">
+                <a:solidFill>
+                  <a:srgbClr val="2B2B2F"/>
+                </a:solidFill>
+                <a:latin typeface="Consolas" panose="020B0609020204030204" pitchFamily="49" charset="0"/>
+                <a:ea typeface="Consolas" pitchFamily="34" charset="-122"/>
+                <a:cs typeface="Consolas" pitchFamily="34" charset="-120"/>
+              </a:rPr>
+              <a:t>ArrivesAt</a:t>
+            </a:r>
+            <a:r>
+              <a:rPr lang="en-US" sz="700" dirty="0">
+                <a:solidFill>
+                  <a:srgbClr val="2B2B2F"/>
+                </a:solidFill>
+                <a:latin typeface="Consolas" panose="020B0609020204030204" pitchFamily="49" charset="0"/>
+                <a:ea typeface="Consolas" pitchFamily="34" charset="-122"/>
+                <a:cs typeface="Consolas" pitchFamily="34" charset="-120"/>
+              </a:rPr>
+              <a:t> → Delhi Airport</a:t>
+            </a:r>
+          </a:p>
+          <a:p>
+            <a:endParaRPr lang="en-US" sz="700" dirty="0">
+              <a:solidFill>
+                <a:srgbClr val="2B2B2F"/>
+              </a:solidFill>
+              <a:latin typeface="Consolas" panose="020B0609020204030204" pitchFamily="49" charset="0"/>
+              <a:ea typeface="Consolas" pitchFamily="34" charset="-122"/>
+              <a:cs typeface="Consolas" pitchFamily="34" charset="-120"/>
+            </a:endParaRPr>
+          </a:p>
+          <a:p>
+            <a:r>
+              <a:rPr lang="en-US" sz="700" dirty="0">
+                <a:solidFill>
+                  <a:srgbClr val="2B2B2F"/>
+                </a:solidFill>
+                <a:latin typeface="Consolas" panose="020B0609020204030204" pitchFamily="49" charset="0"/>
+                <a:ea typeface="Consolas" pitchFamily="34" charset="-122"/>
+                <a:cs typeface="Consolas" pitchFamily="34" charset="-120"/>
+              </a:rPr>
+              <a:t>CREATE EDGE </a:t>
+            </a:r>
+            <a:r>
+              <a:rPr lang="en-US" sz="700" dirty="0" err="1">
+                <a:solidFill>
+                  <a:srgbClr val="2B2B2F"/>
+                </a:solidFill>
+                <a:latin typeface="Consolas" panose="020B0609020204030204" pitchFamily="49" charset="0"/>
+                <a:ea typeface="Consolas" pitchFamily="34" charset="-122"/>
+                <a:cs typeface="Consolas" pitchFamily="34" charset="-120"/>
+              </a:rPr>
+              <a:t>ArrivesAt</a:t>
+            </a:r>
+            <a:r>
+              <a:rPr lang="en-US" sz="700" dirty="0">
+                <a:solidFill>
+                  <a:srgbClr val="2B2B2F"/>
+                </a:solidFill>
+                <a:latin typeface="Consolas" panose="020B0609020204030204" pitchFamily="49" charset="0"/>
+                <a:ea typeface="Consolas" pitchFamily="34" charset="-122"/>
+                <a:cs typeface="Consolas" pitchFamily="34" charset="-120"/>
+              </a:rPr>
+              <a:t> FROM</a:t>
+            </a:r>
+          </a:p>
+          <a:p>
+            <a:r>
+              <a:rPr lang="en-US" sz="700" dirty="0">
+                <a:solidFill>
+                  <a:srgbClr val="2B2B2F"/>
+                </a:solidFill>
+                <a:latin typeface="Consolas" panose="020B0609020204030204" pitchFamily="49" charset="0"/>
+                <a:ea typeface="Consolas" pitchFamily="34" charset="-122"/>
+                <a:cs typeface="Consolas" pitchFamily="34" charset="-120"/>
+              </a:rPr>
+              <a:t>(SELECT FROM Flight WHERE </a:t>
+            </a:r>
+            <a:r>
+              <a:rPr lang="en-US" sz="700" dirty="0" err="1">
+                <a:solidFill>
+                  <a:srgbClr val="2B2B2F"/>
+                </a:solidFill>
+                <a:latin typeface="Consolas" panose="020B0609020204030204" pitchFamily="49" charset="0"/>
+                <a:ea typeface="Consolas" pitchFamily="34" charset="-122"/>
+                <a:cs typeface="Consolas" pitchFamily="34" charset="-120"/>
+              </a:rPr>
+              <a:t>flight_no</a:t>
+            </a:r>
+            <a:r>
+              <a:rPr lang="en-US" sz="700" dirty="0">
+                <a:solidFill>
+                  <a:srgbClr val="2B2B2F"/>
+                </a:solidFill>
+                <a:latin typeface="Consolas" panose="020B0609020204030204" pitchFamily="49" charset="0"/>
+                <a:ea typeface="Consolas" pitchFamily="34" charset="-122"/>
+                <a:cs typeface="Consolas" pitchFamily="34" charset="-120"/>
+              </a:rPr>
+              <a:t> = 'AI101’) TO</a:t>
+            </a:r>
+          </a:p>
+          <a:p>
+            <a:r>
+              <a:rPr lang="en-US" sz="700" dirty="0">
+                <a:solidFill>
+                  <a:srgbClr val="2B2B2F"/>
+                </a:solidFill>
+                <a:latin typeface="Consolas" panose="020B0609020204030204" pitchFamily="49" charset="0"/>
+                <a:ea typeface="Consolas" pitchFamily="34" charset="-122"/>
+                <a:cs typeface="Consolas" pitchFamily="34" charset="-120"/>
+              </a:rPr>
+              <a:t>(SELECT FROM </a:t>
+            </a:r>
+            <a:r>
+              <a:rPr lang="en-US" sz="700" dirty="0" err="1">
+                <a:solidFill>
+                  <a:srgbClr val="2B2B2F"/>
+                </a:solidFill>
+                <a:latin typeface="Consolas" panose="020B0609020204030204" pitchFamily="49" charset="0"/>
+                <a:ea typeface="Consolas" pitchFamily="34" charset="-122"/>
+                <a:cs typeface="Consolas" pitchFamily="34" charset="-120"/>
+              </a:rPr>
+              <a:t>AirportNode</a:t>
+            </a:r>
+            <a:r>
+              <a:rPr lang="en-US" sz="700" dirty="0">
+                <a:solidFill>
+                  <a:srgbClr val="2B2B2F"/>
+                </a:solidFill>
+                <a:latin typeface="Consolas" panose="020B0609020204030204" pitchFamily="49" charset="0"/>
+                <a:ea typeface="Consolas" pitchFamily="34" charset="-122"/>
+                <a:cs typeface="Consolas" pitchFamily="34" charset="-120"/>
+              </a:rPr>
+              <a:t> WHERE code = 'DEL');</a:t>
             </a:r>
             <a:endParaRPr lang="en-US" sz="700" dirty="0">
               <a:latin typeface="Consolas" panose="020B0609020204030204" pitchFamily="49" charset="0"/>
@@ -13968,7 +13767,7 @@
         </p:blipFill>
         <p:spPr>
           <a:xfrm>
-            <a:off x="2286000" y="4754880"/>
+            <a:off x="1856232" y="4731178"/>
             <a:ext cx="5760720" cy="272876"/>
           </a:xfrm>
           <a:prstGeom prst="rect">
@@ -14024,6 +13823,192 @@
           </a:prstGeom>
         </p:spPr>
       </p:pic>
+      <p:sp>
+        <p:nvSpPr>
+          <p:cNvPr id="18" name="TextBox 17">
+            <a:extLst>
+              <a:ext uri="{FF2B5EF4-FFF2-40B4-BE49-F238E27FC236}">
+                <a16:creationId xmlns:a16="http://schemas.microsoft.com/office/drawing/2014/main" id="{0F1AD99B-BEA6-5EC5-707A-13EF4E570388}"/>
+              </a:ext>
+            </a:extLst>
+          </p:cNvPr>
+          <p:cNvSpPr txBox="1"/>
+          <p:nvPr/>
+        </p:nvSpPr>
+        <p:spPr>
+          <a:xfrm>
+            <a:off x="2253996" y="3638842"/>
+            <a:ext cx="2189988" cy="877163"/>
+          </a:xfrm>
+          <a:prstGeom prst="rect">
+            <a:avLst/>
+          </a:prstGeom>
+          <a:noFill/>
+        </p:spPr>
+        <p:txBody>
+          <a:bodyPr wrap="square" rtlCol="0">
+            <a:spAutoFit/>
+          </a:bodyPr>
+          <a:lstStyle/>
+          <a:p>
+            <a:r>
+              <a:rPr lang="en-US" sz="800" dirty="0">
+                <a:solidFill>
+                  <a:srgbClr val="2B2B2F"/>
+                </a:solidFill>
+                <a:latin typeface="Consolas" pitchFamily="34" charset="0"/>
+                <a:ea typeface="Consolas" pitchFamily="34" charset="-122"/>
+                <a:cs typeface="Consolas" pitchFamily="34" charset="-120"/>
+              </a:rPr>
+              <a:t>5) Edges</a:t>
+            </a:r>
+          </a:p>
+          <a:p>
+            <a:r>
+              <a:rPr lang="en-US" sz="800" dirty="0">
+                <a:solidFill>
+                  <a:srgbClr val="2B2B2F"/>
+                </a:solidFill>
+                <a:latin typeface="Consolas" pitchFamily="34" charset="0"/>
+                <a:ea typeface="Consolas" pitchFamily="34" charset="-122"/>
+                <a:cs typeface="Consolas" pitchFamily="34" charset="-120"/>
+              </a:rPr>
+              <a:t>CREATE CLASS </a:t>
+            </a:r>
+            <a:r>
+              <a:rPr lang="en-US" sz="800" dirty="0" err="1">
+                <a:solidFill>
+                  <a:srgbClr val="2B2B2F"/>
+                </a:solidFill>
+                <a:latin typeface="Consolas" pitchFamily="34" charset="0"/>
+                <a:ea typeface="Consolas" pitchFamily="34" charset="-122"/>
+                <a:cs typeface="Consolas" pitchFamily="34" charset="-120"/>
+              </a:rPr>
+              <a:t>ForFlight</a:t>
+            </a:r>
+            <a:r>
+              <a:rPr lang="en-US" sz="800" dirty="0">
+                <a:solidFill>
+                  <a:srgbClr val="2B2B2F"/>
+                </a:solidFill>
+                <a:latin typeface="Consolas" pitchFamily="34" charset="0"/>
+                <a:ea typeface="Consolas" pitchFamily="34" charset="-122"/>
+                <a:cs typeface="Consolas" pitchFamily="34" charset="-120"/>
+              </a:rPr>
+              <a:t> EXTENDS E;</a:t>
+            </a:r>
+          </a:p>
+          <a:p>
+            <a:r>
+              <a:rPr lang="en-US" sz="800" dirty="0">
+                <a:solidFill>
+                  <a:srgbClr val="2B2B2F"/>
+                </a:solidFill>
+                <a:latin typeface="Consolas" pitchFamily="34" charset="0"/>
+                <a:ea typeface="Consolas" pitchFamily="34" charset="-122"/>
+                <a:cs typeface="Consolas" pitchFamily="34" charset="-120"/>
+              </a:rPr>
+              <a:t>CREATE CLASS </a:t>
+            </a:r>
+            <a:r>
+              <a:rPr lang="en-US" sz="800" dirty="0" err="1">
+                <a:solidFill>
+                  <a:srgbClr val="2B2B2F"/>
+                </a:solidFill>
+                <a:latin typeface="Consolas" pitchFamily="34" charset="0"/>
+                <a:ea typeface="Consolas" pitchFamily="34" charset="-122"/>
+                <a:cs typeface="Consolas" pitchFamily="34" charset="-120"/>
+              </a:rPr>
+              <a:t>ArrivesAt</a:t>
+            </a:r>
+            <a:r>
+              <a:rPr lang="en-US" sz="800" dirty="0">
+                <a:solidFill>
+                  <a:srgbClr val="2B2B2F"/>
+                </a:solidFill>
+                <a:latin typeface="Consolas" pitchFamily="34" charset="0"/>
+                <a:ea typeface="Consolas" pitchFamily="34" charset="-122"/>
+                <a:cs typeface="Consolas" pitchFamily="34" charset="-120"/>
+              </a:rPr>
+              <a:t> EXTENDS E;</a:t>
+            </a:r>
+          </a:p>
+          <a:p>
+            <a:r>
+              <a:rPr lang="en-US" sz="800" dirty="0">
+                <a:solidFill>
+                  <a:srgbClr val="2B2B2F"/>
+                </a:solidFill>
+                <a:latin typeface="Consolas" pitchFamily="34" charset="0"/>
+                <a:ea typeface="Consolas" pitchFamily="34" charset="-122"/>
+                <a:cs typeface="Consolas" pitchFamily="34" charset="-120"/>
+              </a:rPr>
+              <a:t>CREATE CLASS </a:t>
+            </a:r>
+            <a:r>
+              <a:rPr lang="en-US" sz="800" dirty="0" err="1">
+                <a:solidFill>
+                  <a:srgbClr val="2B2B2F"/>
+                </a:solidFill>
+                <a:latin typeface="Consolas" pitchFamily="34" charset="0"/>
+                <a:ea typeface="Consolas" pitchFamily="34" charset="-122"/>
+                <a:cs typeface="Consolas" pitchFamily="34" charset="-120"/>
+              </a:rPr>
+              <a:t>DepartsFrom</a:t>
+            </a:r>
+            <a:r>
+              <a:rPr lang="en-US" sz="800" dirty="0">
+                <a:solidFill>
+                  <a:srgbClr val="2B2B2F"/>
+                </a:solidFill>
+                <a:latin typeface="Consolas" pitchFamily="34" charset="0"/>
+                <a:ea typeface="Consolas" pitchFamily="34" charset="-122"/>
+                <a:cs typeface="Consolas" pitchFamily="34" charset="-120"/>
+              </a:rPr>
+              <a:t> EXTENDS E;</a:t>
+            </a:r>
+          </a:p>
+          <a:p>
+            <a:r>
+              <a:rPr lang="en-US" sz="800" dirty="0">
+                <a:solidFill>
+                  <a:srgbClr val="2B2B2F"/>
+                </a:solidFill>
+                <a:latin typeface="Consolas" pitchFamily="34" charset="0"/>
+                <a:ea typeface="Consolas" pitchFamily="34" charset="-122"/>
+                <a:cs typeface="Consolas" pitchFamily="34" charset="-120"/>
+              </a:rPr>
+              <a:t>CREATE CLASS </a:t>
+            </a:r>
+            <a:r>
+              <a:rPr lang="en-US" sz="800" dirty="0" err="1">
+                <a:solidFill>
+                  <a:srgbClr val="2B2B2F"/>
+                </a:solidFill>
+                <a:latin typeface="Consolas" pitchFamily="34" charset="0"/>
+                <a:ea typeface="Consolas" pitchFamily="34" charset="-122"/>
+                <a:cs typeface="Consolas" pitchFamily="34" charset="-120"/>
+              </a:rPr>
+              <a:t>MakesBooking</a:t>
+            </a:r>
+            <a:r>
+              <a:rPr lang="en-US" sz="800" dirty="0">
+                <a:solidFill>
+                  <a:srgbClr val="2B2B2F"/>
+                </a:solidFill>
+                <a:latin typeface="Consolas" pitchFamily="34" charset="0"/>
+                <a:ea typeface="Consolas" pitchFamily="34" charset="-122"/>
+                <a:cs typeface="Consolas" pitchFamily="34" charset="-120"/>
+              </a:rPr>
+              <a:t> EXTENDS E;</a:t>
+            </a:r>
+            <a:endParaRPr lang="en-US" sz="800" dirty="0"/>
+          </a:p>
+          <a:p>
+            <a:endParaRPr lang="en-US" sz="1100" dirty="0"/>
+          </a:p>
+        </p:txBody>
+      </p:sp>
     </p:spTree>
   </p:cSld>
   <p:clrMapOvr>
@@ -14306,263 +14291,165 @@
               <a:rPr lang="en-US" sz="700" dirty="0">
                 <a:latin typeface="Consolas" panose="020B0609020204030204" pitchFamily="49" charset="0"/>
               </a:rPr>
-              <a:t>1. Create a passenger</a:t>
-            </a:r>
-            <a:endParaRPr lang="en-US" sz="700" dirty="0">
-              <a:solidFill>
-                <a:srgbClr val="2B2B2F"/>
-              </a:solidFill>
-              <a:latin typeface="Consolas" panose="020B0609020204030204" pitchFamily="49" charset="0"/>
-              <a:ea typeface="Consolas" pitchFamily="34" charset="-122"/>
-              <a:cs typeface="Consolas" pitchFamily="34" charset="-120"/>
-            </a:endParaRPr>
-          </a:p>
-          <a:p>
-            <a:pPr marL="0" indent="0">
-              <a:buNone/>
-            </a:pPr>
-            <a:r>
-              <a:rPr lang="en-US" sz="700" dirty="0">
-                <a:solidFill>
-                  <a:srgbClr val="2B2B2F"/>
-                </a:solidFill>
-                <a:latin typeface="Consolas" panose="020B0609020204030204" pitchFamily="49" charset="0"/>
-                <a:ea typeface="Consolas" pitchFamily="34" charset="-122"/>
-                <a:cs typeface="Consolas" pitchFamily="34" charset="-120"/>
-              </a:rPr>
-              <a:t>CREATE VERTEX Passenger SET </a:t>
-            </a:r>
-            <a:r>
-              <a:rPr lang="en-US" sz="700" dirty="0" err="1">
-                <a:solidFill>
-                  <a:srgbClr val="2B2B2F"/>
-                </a:solidFill>
-                <a:latin typeface="Consolas" panose="020B0609020204030204" pitchFamily="49" charset="0"/>
-                <a:ea typeface="Consolas" pitchFamily="34" charset="-122"/>
-                <a:cs typeface="Consolas" pitchFamily="34" charset="-120"/>
-              </a:rPr>
-              <a:t>pid</a:t>
-            </a:r>
-            <a:r>
-              <a:rPr lang="en-US" sz="700" dirty="0">
-                <a:solidFill>
-                  <a:srgbClr val="2B2B2F"/>
-                </a:solidFill>
-                <a:latin typeface="Consolas" panose="020B0609020204030204" pitchFamily="49" charset="0"/>
-                <a:ea typeface="Consolas" pitchFamily="34" charset="-122"/>
-                <a:cs typeface="Consolas" pitchFamily="34" charset="-120"/>
-              </a:rPr>
-              <a:t>=1,</a:t>
-            </a:r>
+              <a:t>1) Create a passenger</a:t>
+            </a:r>
+          </a:p>
+          <a:p>
             <a:r>
               <a:rPr lang="en-US" sz="700" dirty="0">
                 <a:latin typeface="Consolas" panose="020B0609020204030204" pitchFamily="49" charset="0"/>
               </a:rPr>
-              <a:t> </a:t>
-            </a:r>
-            <a:r>
-              <a:rPr lang="en-US" sz="700" dirty="0">
-                <a:solidFill>
-                  <a:srgbClr val="2B2B2F"/>
-                </a:solidFill>
-                <a:latin typeface="Consolas" panose="020B0609020204030204" pitchFamily="49" charset="0"/>
-                <a:ea typeface="Consolas" pitchFamily="34" charset="-122"/>
-                <a:cs typeface="Consolas" pitchFamily="34" charset="-120"/>
-              </a:rPr>
-              <a:t> name='Asha', email='asha@x.com’;</a:t>
-            </a:r>
-          </a:p>
-          <a:p>
-            <a:pPr marL="0" indent="0">
-              <a:buNone/>
-            </a:pPr>
-            <a:endParaRPr lang="en-US" sz="700" dirty="0">
-              <a:solidFill>
-                <a:srgbClr val="2B2B2F"/>
-              </a:solidFill>
-              <a:latin typeface="Consolas" panose="020B0609020204030204" pitchFamily="49" charset="0"/>
-            </a:endParaRPr>
+              <a:t>CREATE VERTEX Passenger</a:t>
+            </a:r>
           </a:p>
           <a:p>
             <a:r>
               <a:rPr lang="en-US" sz="700" dirty="0">
                 <a:latin typeface="Consolas" panose="020B0609020204030204" pitchFamily="49" charset="0"/>
               </a:rPr>
-              <a:t>2. Retrieve flights with fares below 6000</a:t>
-            </a:r>
-          </a:p>
-          <a:p>
-            <a:pPr marL="0" indent="0">
-              <a:buNone/>
-            </a:pPr>
-            <a:r>
-              <a:rPr lang="en-US" sz="700" dirty="0">
-                <a:solidFill>
-                  <a:srgbClr val="2B2B2F"/>
-                </a:solidFill>
+              <a:t>SET </a:t>
+            </a:r>
+            <a:r>
+              <a:rPr lang="en-US" sz="700" dirty="0" err="1">
                 <a:latin typeface="Consolas" panose="020B0609020204030204" pitchFamily="49" charset="0"/>
-                <a:ea typeface="Consolas" pitchFamily="34" charset="-122"/>
-                <a:cs typeface="Consolas" pitchFamily="34" charset="-120"/>
-              </a:rPr>
-              <a:t>SELECT FROM Flight WHERE fare &lt; 6000</a:t>
+              </a:rPr>
+              <a:t>pid</a:t>
             </a:r>
             <a:r>
               <a:rPr lang="en-US" sz="700" dirty="0">
                 <a:latin typeface="Consolas" panose="020B0609020204030204" pitchFamily="49" charset="0"/>
               </a:rPr>
-              <a:t> </a:t>
-            </a:r>
-            <a:r>
-              <a:rPr lang="en-US" sz="700" dirty="0">
-                <a:solidFill>
-                  <a:srgbClr val="2B2B2F"/>
-                </a:solidFill>
-                <a:latin typeface="Consolas" panose="020B0609020204030204" pitchFamily="49" charset="0"/>
-                <a:ea typeface="Consolas" pitchFamily="34" charset="-122"/>
-                <a:cs typeface="Consolas" pitchFamily="34" charset="-120"/>
-              </a:rPr>
-              <a:t>ORDER BY fare;</a:t>
-            </a:r>
-          </a:p>
-          <a:p>
-            <a:pPr marL="0" indent="0">
-              <a:buNone/>
-            </a:pPr>
-            <a:endParaRPr lang="en-US" sz="700" dirty="0">
-              <a:solidFill>
-                <a:srgbClr val="2B2B2F"/>
-              </a:solidFill>
-              <a:latin typeface="Consolas" panose="020B0609020204030204" pitchFamily="49" charset="0"/>
-              <a:ea typeface="Consolas" pitchFamily="34" charset="-122"/>
-              <a:cs typeface="Consolas" pitchFamily="34" charset="-120"/>
-            </a:endParaRPr>
-          </a:p>
-          <a:p>
-            <a:r>
-              <a:rPr lang="en-US" sz="700" dirty="0">
-                <a:latin typeface="Consolas" panose="020B0609020204030204" pitchFamily="49" charset="0"/>
-              </a:rPr>
-              <a:t>3. Update a flight's fare</a:t>
-            </a:r>
-          </a:p>
-          <a:p>
-            <a:pPr marL="0" indent="0">
-              <a:buNone/>
-            </a:pPr>
-            <a:r>
-              <a:rPr lang="en-US" sz="700" dirty="0">
-                <a:solidFill>
-                  <a:srgbClr val="2B2B2F"/>
-                </a:solidFill>
-                <a:latin typeface="Consolas" panose="020B0609020204030204" pitchFamily="49" charset="0"/>
-                <a:ea typeface="Consolas" pitchFamily="34" charset="-122"/>
-                <a:cs typeface="Consolas" pitchFamily="34" charset="-120"/>
-              </a:rPr>
-              <a:t>UPDATE Flight SET fare = 5500</a:t>
-            </a:r>
+              <a:t> = 1, name = 'Asha', email = 'asha@x.com';</a:t>
+            </a:r>
+          </a:p>
+          <a:p>
             <a:endParaRPr lang="en-US" sz="700" dirty="0">
               <a:latin typeface="Consolas" panose="020B0609020204030204" pitchFamily="49" charset="0"/>
             </a:endParaRPr>
           </a:p>
           <a:p>
-            <a:pPr marL="0" indent="0">
-              <a:buNone/>
-            </a:pPr>
-            <a:r>
-              <a:rPr lang="en-US" sz="700" dirty="0">
-                <a:solidFill>
-                  <a:srgbClr val="2B2B2F"/>
-                </a:solidFill>
-                <a:latin typeface="Consolas" panose="020B0609020204030204" pitchFamily="49" charset="0"/>
-                <a:ea typeface="Consolas" pitchFamily="34" charset="-122"/>
-                <a:cs typeface="Consolas" pitchFamily="34" charset="-120"/>
-              </a:rPr>
-              <a:t>WHERE </a:t>
-            </a:r>
-            <a:r>
-              <a:rPr lang="en-US" sz="700" dirty="0" err="1">
-                <a:solidFill>
-                  <a:srgbClr val="2B2B2F"/>
-                </a:solidFill>
-                <a:latin typeface="Consolas" panose="020B0609020204030204" pitchFamily="49" charset="0"/>
-                <a:ea typeface="Consolas" pitchFamily="34" charset="-122"/>
-                <a:cs typeface="Consolas" pitchFamily="34" charset="-120"/>
-              </a:rPr>
-              <a:t>flight_no</a:t>
-            </a:r>
-            <a:r>
-              <a:rPr lang="en-US" sz="700" dirty="0">
-                <a:solidFill>
-                  <a:srgbClr val="2B2B2F"/>
-                </a:solidFill>
-                <a:latin typeface="Consolas" panose="020B0609020204030204" pitchFamily="49" charset="0"/>
-                <a:ea typeface="Consolas" pitchFamily="34" charset="-122"/>
-                <a:cs typeface="Consolas" pitchFamily="34" charset="-120"/>
-              </a:rPr>
-              <a:t>='AI101’;</a:t>
-            </a:r>
-          </a:p>
-          <a:p>
-            <a:pPr marL="0" indent="0">
-              <a:buNone/>
-            </a:pPr>
-            <a:endParaRPr lang="en-US" sz="700" dirty="0">
-              <a:solidFill>
-                <a:srgbClr val="2B2B2F"/>
-              </a:solidFill>
-              <a:latin typeface="Consolas" panose="020B0609020204030204" pitchFamily="49" charset="0"/>
-              <a:ea typeface="Consolas" pitchFamily="34" charset="-122"/>
-              <a:cs typeface="Consolas" pitchFamily="34" charset="-120"/>
-            </a:endParaRPr>
-          </a:p>
-          <a:p>
             <a:r>
               <a:rPr lang="en-US" sz="700" dirty="0">
                 <a:latin typeface="Consolas" panose="020B0609020204030204" pitchFamily="49" charset="0"/>
               </a:rPr>
-              <a:t>4. Delete a passenger</a:t>
-            </a:r>
-          </a:p>
-          <a:p>
-            <a:pPr marL="0" indent="0">
-              <a:buNone/>
-            </a:pPr>
+              <a:t>2) Retrieve flights with fares below 6000</a:t>
+            </a:r>
+          </a:p>
+          <a:p>
             <a:r>
               <a:rPr lang="en-US" sz="700" dirty="0">
-                <a:solidFill>
-                  <a:srgbClr val="2B2B2F"/>
-                </a:solidFill>
                 <a:latin typeface="Consolas" panose="020B0609020204030204" pitchFamily="49" charset="0"/>
-                <a:ea typeface="Consolas" pitchFamily="34" charset="-122"/>
-                <a:cs typeface="Consolas" pitchFamily="34" charset="-120"/>
-              </a:rPr>
-              <a:t>DELETE VERTEX Passenger WHERE </a:t>
-            </a:r>
-            <a:r>
-              <a:rPr lang="en-US" sz="700" dirty="0" err="1">
-                <a:solidFill>
-                  <a:srgbClr val="2B2B2F"/>
-                </a:solidFill>
+              </a:rPr>
+              <a:t>SELECT FROM Flight WHERE fare &lt; 6000</a:t>
+            </a:r>
+          </a:p>
+          <a:p>
+            <a:r>
+              <a:rPr lang="en-US" sz="700" dirty="0">
                 <a:latin typeface="Consolas" panose="020B0609020204030204" pitchFamily="49" charset="0"/>
-                <a:ea typeface="Consolas" pitchFamily="34" charset="-122"/>
-                <a:cs typeface="Consolas" pitchFamily="34" charset="-120"/>
-              </a:rPr>
-              <a:t>pid</a:t>
-            </a:r>
-            <a:r>
-              <a:rPr lang="en-US" sz="700" dirty="0">
-                <a:solidFill>
-                  <a:srgbClr val="2B2B2F"/>
-                </a:solidFill>
-                <a:latin typeface="Consolas" panose="020B0609020204030204" pitchFamily="49" charset="0"/>
-                <a:ea typeface="Consolas" pitchFamily="34" charset="-122"/>
-                <a:cs typeface="Consolas" pitchFamily="34" charset="-120"/>
-              </a:rPr>
-              <a:t>=1;</a:t>
-            </a:r>
+              </a:rPr>
+              <a:t>ORDER BY fare;</a:t>
+            </a:r>
+          </a:p>
+          <a:p>
             <a:endParaRPr lang="en-US" sz="700" dirty="0">
               <a:latin typeface="Consolas" panose="020B0609020204030204" pitchFamily="49" charset="0"/>
             </a:endParaRPr>
+          </a:p>
+          <a:p>
+            <a:r>
+              <a:rPr lang="en-US" sz="700" dirty="0">
+                <a:latin typeface="Consolas" panose="020B0609020204030204" pitchFamily="49" charset="0"/>
+              </a:rPr>
+              <a:t>3) Update a flight's fare</a:t>
+            </a:r>
+          </a:p>
+          <a:p>
+            <a:r>
+              <a:rPr lang="en-US" sz="700" dirty="0">
+                <a:latin typeface="Consolas" panose="020B0609020204030204" pitchFamily="49" charset="0"/>
+              </a:rPr>
+              <a:t>UPDATE Flight</a:t>
+            </a:r>
+          </a:p>
+          <a:p>
+            <a:r>
+              <a:rPr lang="en-US" sz="700" dirty="0">
+                <a:latin typeface="Consolas" panose="020B0609020204030204" pitchFamily="49" charset="0"/>
+              </a:rPr>
+              <a:t>SET fare = 5500</a:t>
+            </a:r>
+          </a:p>
+          <a:p>
+            <a:r>
+              <a:rPr lang="en-US" sz="700" dirty="0">
+                <a:latin typeface="Consolas" panose="020B0609020204030204" pitchFamily="49" charset="0"/>
+              </a:rPr>
+              <a:t>WHERE </a:t>
+            </a:r>
+            <a:r>
+              <a:rPr lang="en-US" sz="700" dirty="0" err="1">
+                <a:latin typeface="Consolas" panose="020B0609020204030204" pitchFamily="49" charset="0"/>
+              </a:rPr>
+              <a:t>flight_no</a:t>
+            </a:r>
+            <a:r>
+              <a:rPr lang="en-US" sz="700" dirty="0">
+                <a:latin typeface="Consolas" panose="020B0609020204030204" pitchFamily="49" charset="0"/>
+              </a:rPr>
+              <a:t> = 'AI101';</a:t>
+            </a:r>
+          </a:p>
+          <a:p>
+            <a:endParaRPr lang="en-US" sz="700" dirty="0">
+              <a:latin typeface="Consolas" panose="020B0609020204030204" pitchFamily="49" charset="0"/>
+            </a:endParaRPr>
+          </a:p>
+          <a:p>
+            <a:endParaRPr lang="en-US" sz="700" dirty="0">
+              <a:latin typeface="Consolas" panose="020B0609020204030204" pitchFamily="49" charset="0"/>
+            </a:endParaRPr>
+          </a:p>
+          <a:p>
+            <a:r>
+              <a:rPr lang="en-US" sz="700" dirty="0">
+                <a:latin typeface="Consolas" panose="020B0609020204030204" pitchFamily="49" charset="0"/>
+              </a:rPr>
+              <a:t>-- 4) Delete a passenger</a:t>
+            </a:r>
+          </a:p>
+          <a:p>
+            <a:endParaRPr lang="en-US" sz="700" dirty="0">
+              <a:latin typeface="Consolas" panose="020B0609020204030204" pitchFamily="49" charset="0"/>
+            </a:endParaRPr>
+          </a:p>
+          <a:p>
+            <a:r>
+              <a:rPr lang="en-US" sz="700" dirty="0">
+                <a:latin typeface="Consolas" panose="020B0609020204030204" pitchFamily="49" charset="0"/>
+              </a:rPr>
+              <a:t>DELETE VERTEX Passenger</a:t>
+            </a:r>
+          </a:p>
+          <a:p>
+            <a:r>
+              <a:rPr lang="en-US" sz="700" dirty="0">
+                <a:latin typeface="Consolas" panose="020B0609020204030204" pitchFamily="49" charset="0"/>
+              </a:rPr>
+              <a:t>WHERE </a:t>
+            </a:r>
+            <a:r>
+              <a:rPr lang="en-US" sz="700" dirty="0" err="1">
+                <a:latin typeface="Consolas" panose="020B0609020204030204" pitchFamily="49" charset="0"/>
+              </a:rPr>
+              <a:t>pid</a:t>
+            </a:r>
+            <a:r>
+              <a:rPr lang="en-US" sz="700" dirty="0">
+                <a:latin typeface="Consolas" panose="020B0609020204030204" pitchFamily="49" charset="0"/>
+              </a:rPr>
+              <a:t> = 1;</a:t>
+            </a:r>
           </a:p>
         </p:txBody>
       </p:sp>
@@ -14651,9 +14538,6 @@
           <a:bodyPr wrap="square" lIns="0" tIns="0" rIns="0" bIns="0" rtlCol="0" anchor="t"/>
           <a:lstStyle/>
           <a:p>
-            <a:pPr marL="0" indent="0">
-              <a:buNone/>
-            </a:pPr>
             <a:r>
               <a:rPr lang="en-US" sz="750" dirty="0">
                 <a:solidFill>
@@ -14663,14 +14547,10 @@
                 <a:ea typeface="Consolas" pitchFamily="34" charset="-122"/>
                 <a:cs typeface="Consolas" pitchFamily="34" charset="-120"/>
               </a:rPr>
-              <a:t>-- direct destinations from Chennai</a:t>
-            </a:r>
-            <a:endParaRPr lang="en-US" sz="750" dirty="0"/>
-          </a:p>
-          <a:p>
-            <a:pPr marL="0" indent="0">
-              <a:buNone/>
-            </a:pPr>
+              <a:t>1) Direct destinations from Chennai</a:t>
+            </a:r>
+          </a:p>
+          <a:p>
             <a:r>
               <a:rPr lang="en-US" sz="750" dirty="0">
                 <a:solidFill>
@@ -14680,16 +14560,10 @@
                 <a:ea typeface="Consolas" pitchFamily="34" charset="-122"/>
                 <a:cs typeface="Consolas" pitchFamily="34" charset="-120"/>
               </a:rPr>
-              <a:t>SELECT expand(out('Departs').out('Arrives'))</a:t>
-            </a:r>
-            <a:endParaRPr lang="en-US" sz="750" dirty="0"/>
-          </a:p>
-          <a:p>
-            <a:pPr marL="0" indent="0">
-              <a:buNone/>
-            </a:pPr>
-            <a:r>
-              <a:rPr lang="en-US" sz="750" dirty="0">
+              <a:t>SELECT expand(out('</a:t>
+            </a:r>
+            <a:r>
+              <a:rPr lang="en-US" sz="750" dirty="0" err="1">
                 <a:solidFill>
                   <a:srgbClr val="2B2B2F"/>
                 </a:solidFill>
@@ -14697,20 +14571,8 @@
                 <a:ea typeface="Consolas" pitchFamily="34" charset="-122"/>
                 <a:cs typeface="Consolas" pitchFamily="34" charset="-120"/>
               </a:rPr>
-              <a:t>FROM Airport WHERE code='MAA';</a:t>
-            </a:r>
-            <a:endParaRPr lang="en-US" sz="750" dirty="0"/>
-          </a:p>
-          <a:p>
-            <a:pPr marL="0" indent="0">
-              <a:buNone/>
-            </a:pPr>
-            <a:endParaRPr lang="en-US" sz="750" dirty="0"/>
-          </a:p>
-          <a:p>
-            <a:pPr marL="0" indent="0">
-              <a:buNone/>
-            </a:pPr>
+              <a:t>DepartsFrom</a:t>
+            </a:r>
             <a:r>
               <a:rPr lang="en-US" sz="750" dirty="0">
                 <a:solidFill>
@@ -14720,16 +14582,10 @@
                 <a:ea typeface="Consolas" pitchFamily="34" charset="-122"/>
                 <a:cs typeface="Consolas" pitchFamily="34" charset="-120"/>
               </a:rPr>
-              <a:t>-- all flights booked by Asha---</a:t>
-            </a:r>
-            <a:endParaRPr lang="en-US" sz="750" dirty="0"/>
-          </a:p>
-          <a:p>
-            <a:pPr marL="0" indent="0">
-              <a:buNone/>
-            </a:pPr>
-            <a:r>
-              <a:rPr lang="en-US" sz="750" dirty="0">
+              <a:t>').out('</a:t>
+            </a:r>
+            <a:r>
+              <a:rPr lang="en-US" sz="750" dirty="0" err="1">
                 <a:solidFill>
                   <a:srgbClr val="2B2B2F"/>
                 </a:solidFill>
@@ -14737,14 +14593,8 @@
                 <a:ea typeface="Consolas" pitchFamily="34" charset="-122"/>
                 <a:cs typeface="Consolas" pitchFamily="34" charset="-120"/>
               </a:rPr>
-              <a:t>SELECT expand(out('Booked')) FROM Passenger</a:t>
-            </a:r>
-            <a:endParaRPr lang="en-US" sz="750" dirty="0"/>
-          </a:p>
-          <a:p>
-            <a:pPr marL="0" indent="0">
-              <a:buNone/>
-            </a:pPr>
+              <a:t>ArrivesAt</a:t>
+            </a:r>
             <a:r>
               <a:rPr lang="en-US" sz="750" dirty="0">
                 <a:solidFill>
@@ -14754,7 +14604,136 @@
                 <a:ea typeface="Consolas" pitchFamily="34" charset="-122"/>
                 <a:cs typeface="Consolas" pitchFamily="34" charset="-120"/>
               </a:rPr>
-              <a:t>WHERE name='Asha';</a:t>
+              <a:t>'))</a:t>
+            </a:r>
+          </a:p>
+          <a:p>
+            <a:r>
+              <a:rPr lang="en-US" sz="750" dirty="0">
+                <a:solidFill>
+                  <a:srgbClr val="2B2B2F"/>
+                </a:solidFill>
+                <a:latin typeface="Consolas" pitchFamily="34" charset="0"/>
+                <a:ea typeface="Consolas" pitchFamily="34" charset="-122"/>
+                <a:cs typeface="Consolas" pitchFamily="34" charset="-120"/>
+              </a:rPr>
+              <a:t>FROM </a:t>
+            </a:r>
+            <a:r>
+              <a:rPr lang="en-US" sz="750" dirty="0" err="1">
+                <a:solidFill>
+                  <a:srgbClr val="2B2B2F"/>
+                </a:solidFill>
+                <a:latin typeface="Consolas" pitchFamily="34" charset="0"/>
+                <a:ea typeface="Consolas" pitchFamily="34" charset="-122"/>
+                <a:cs typeface="Consolas" pitchFamily="34" charset="-120"/>
+              </a:rPr>
+              <a:t>AirportNode</a:t>
+            </a:r>
+            <a:endParaRPr lang="en-US" sz="750" dirty="0">
+              <a:solidFill>
+                <a:srgbClr val="2B2B2F"/>
+              </a:solidFill>
+              <a:latin typeface="Consolas" pitchFamily="34" charset="0"/>
+              <a:ea typeface="Consolas" pitchFamily="34" charset="-122"/>
+              <a:cs typeface="Consolas" pitchFamily="34" charset="-120"/>
+            </a:endParaRPr>
+          </a:p>
+          <a:p>
+            <a:r>
+              <a:rPr lang="en-US" sz="750" dirty="0">
+                <a:solidFill>
+                  <a:srgbClr val="2B2B2F"/>
+                </a:solidFill>
+                <a:latin typeface="Consolas" pitchFamily="34" charset="0"/>
+                <a:ea typeface="Consolas" pitchFamily="34" charset="-122"/>
+                <a:cs typeface="Consolas" pitchFamily="34" charset="-120"/>
+              </a:rPr>
+              <a:t>WHERE code = 'MAA';</a:t>
+            </a:r>
+          </a:p>
+          <a:p>
+            <a:endParaRPr lang="en-US" sz="750" dirty="0">
+              <a:solidFill>
+                <a:srgbClr val="2B2B2F"/>
+              </a:solidFill>
+              <a:latin typeface="Consolas" pitchFamily="34" charset="0"/>
+              <a:ea typeface="Consolas" pitchFamily="34" charset="-122"/>
+              <a:cs typeface="Consolas" pitchFamily="34" charset="-120"/>
+            </a:endParaRPr>
+          </a:p>
+          <a:p>
+            <a:r>
+              <a:rPr lang="en-US" sz="750" dirty="0">
+                <a:solidFill>
+                  <a:srgbClr val="2B2B2F"/>
+                </a:solidFill>
+                <a:latin typeface="Consolas" pitchFamily="34" charset="0"/>
+                <a:ea typeface="Consolas" pitchFamily="34" charset="-122"/>
+                <a:cs typeface="Consolas" pitchFamily="34" charset="-120"/>
+              </a:rPr>
+              <a:t>2) All bookings made by Asha</a:t>
+            </a:r>
+          </a:p>
+          <a:p>
+            <a:r>
+              <a:rPr lang="en-US" sz="750" dirty="0">
+                <a:solidFill>
+                  <a:srgbClr val="2B2B2F"/>
+                </a:solidFill>
+                <a:latin typeface="Consolas" pitchFamily="34" charset="0"/>
+                <a:ea typeface="Consolas" pitchFamily="34" charset="-122"/>
+                <a:cs typeface="Consolas" pitchFamily="34" charset="-120"/>
+              </a:rPr>
+              <a:t>SELECT expand(out('</a:t>
+            </a:r>
+            <a:r>
+              <a:rPr lang="en-US" sz="750" dirty="0" err="1">
+                <a:solidFill>
+                  <a:srgbClr val="2B2B2F"/>
+                </a:solidFill>
+                <a:latin typeface="Consolas" pitchFamily="34" charset="0"/>
+                <a:ea typeface="Consolas" pitchFamily="34" charset="-122"/>
+                <a:cs typeface="Consolas" pitchFamily="34" charset="-120"/>
+              </a:rPr>
+              <a:t>MakesBooking</a:t>
+            </a:r>
+            <a:r>
+              <a:rPr lang="en-US" sz="750" dirty="0">
+                <a:solidFill>
+                  <a:srgbClr val="2B2B2F"/>
+                </a:solidFill>
+                <a:latin typeface="Consolas" pitchFamily="34" charset="0"/>
+                <a:ea typeface="Consolas" pitchFamily="34" charset="-122"/>
+                <a:cs typeface="Consolas" pitchFamily="34" charset="-120"/>
+              </a:rPr>
+              <a:t>'))</a:t>
+            </a:r>
+          </a:p>
+          <a:p>
+            <a:r>
+              <a:rPr lang="en-US" sz="750" dirty="0">
+                <a:solidFill>
+                  <a:srgbClr val="2B2B2F"/>
+                </a:solidFill>
+                <a:latin typeface="Consolas" pitchFamily="34" charset="0"/>
+                <a:ea typeface="Consolas" pitchFamily="34" charset="-122"/>
+                <a:cs typeface="Consolas" pitchFamily="34" charset="-120"/>
+              </a:rPr>
+              <a:t>FROM Passenger</a:t>
+            </a:r>
+          </a:p>
+          <a:p>
+            <a:r>
+              <a:rPr lang="en-US" sz="750" dirty="0">
+                <a:solidFill>
+                  <a:srgbClr val="2B2B2F"/>
+                </a:solidFill>
+                <a:latin typeface="Consolas" pitchFamily="34" charset="0"/>
+                <a:ea typeface="Consolas" pitchFamily="34" charset="-122"/>
+                <a:cs typeface="Consolas" pitchFamily="34" charset="-120"/>
+              </a:rPr>
+              <a:t>WHERE name = 'Asha';</a:t>
             </a:r>
             <a:endParaRPr lang="en-US" sz="750" dirty="0"/>
           </a:p>
@@ -14768,8 +14747,8 @@
         </p:nvSpPr>
         <p:spPr>
           <a:xfrm>
-            <a:off x="365760" y="2606040"/>
-            <a:ext cx="4114800" cy="1783080"/>
+            <a:off x="365760" y="2606039"/>
+            <a:ext cx="4114800" cy="2055993"/>
           </a:xfrm>
           <a:prstGeom prst="rect">
             <a:avLst/>
@@ -14845,9 +14824,6 @@
           <a:bodyPr wrap="square" lIns="0" tIns="0" rIns="0" bIns="0" rtlCol="0" anchor="t"/>
           <a:lstStyle/>
           <a:p>
-            <a:pPr marL="0" indent="0">
-              <a:buNone/>
-            </a:pPr>
             <a:r>
               <a:rPr lang="en-US" sz="700" dirty="0">
                 <a:solidFill>
@@ -14857,14 +14833,20 @@
                 <a:ea typeface="Consolas" pitchFamily="34" charset="-122"/>
                 <a:cs typeface="Consolas" pitchFamily="34" charset="-120"/>
               </a:rPr>
-              <a:t>MATCH {class: Passenger, as: p,</a:t>
-            </a:r>
-            <a:endParaRPr lang="en-US" sz="700" dirty="0"/>
-          </a:p>
-          <a:p>
-            <a:pPr marL="0" indent="0">
-              <a:buNone/>
-            </a:pPr>
+              <a:t>1) Retrieve the flights booked by Asha and their destination cities</a:t>
+            </a:r>
+          </a:p>
+          <a:p>
+            <a:endParaRPr lang="en-US" sz="700" dirty="0">
+              <a:solidFill>
+                <a:srgbClr val="2B2B2F"/>
+              </a:solidFill>
+              <a:latin typeface="Consolas" pitchFamily="34" charset="0"/>
+              <a:ea typeface="Consolas" pitchFamily="34" charset="-122"/>
+              <a:cs typeface="Consolas" pitchFamily="34" charset="-120"/>
+            </a:endParaRPr>
+          </a:p>
+          <a:p>
             <a:r>
               <a:rPr lang="en-US" sz="700" dirty="0">
                 <a:solidFill>
@@ -14874,14 +14856,10 @@
                 <a:ea typeface="Consolas" pitchFamily="34" charset="-122"/>
                 <a:cs typeface="Consolas" pitchFamily="34" charset="-120"/>
               </a:rPr>
-              <a:t>  where: (name='Asha’)}         #record</a:t>
-            </a:r>
-            <a:endParaRPr lang="en-US" sz="700" dirty="0"/>
-          </a:p>
-          <a:p>
-            <a:pPr marL="0" indent="0">
-              <a:buNone/>
-            </a:pPr>
+              <a:t>MATCH {class: Passenger, as: p,</a:t>
+            </a:r>
+          </a:p>
+          <a:p>
             <a:r>
               <a:rPr lang="en-US" sz="700" dirty="0">
                 <a:solidFill>
@@ -14891,14 +14869,10 @@
                 <a:ea typeface="Consolas" pitchFamily="34" charset="-122"/>
                 <a:cs typeface="Consolas" pitchFamily="34" charset="-120"/>
               </a:rPr>
-              <a:t> .out('Booked'){as: f}          #edge</a:t>
-            </a:r>
-            <a:endParaRPr lang="en-US" sz="700" dirty="0"/>
-          </a:p>
-          <a:p>
-            <a:pPr marL="0" indent="0">
-              <a:buNone/>
-            </a:pPr>
+              <a:t>       where: (name = 'Asha')}</a:t>
+            </a:r>
+          </a:p>
+          <a:p>
             <a:r>
               <a:rPr lang="en-US" sz="700" dirty="0">
                 <a:solidFill>
@@ -14908,16 +14882,10 @@
                 <a:ea typeface="Consolas" pitchFamily="34" charset="-122"/>
                 <a:cs typeface="Consolas" pitchFamily="34" charset="-120"/>
               </a:rPr>
-              <a:t> .out('Arrives'){as: a}         #edge</a:t>
-            </a:r>
-            <a:endParaRPr lang="en-US" sz="700" dirty="0"/>
-          </a:p>
-          <a:p>
-            <a:pPr marL="0" indent="0">
-              <a:buNone/>
-            </a:pPr>
-            <a:r>
-              <a:rPr lang="en-US" sz="700" dirty="0">
+              <a:t>      .out('</a:t>
+            </a:r>
+            <a:r>
+              <a:rPr lang="en-US" sz="700" dirty="0" err="1">
                 <a:solidFill>
                   <a:srgbClr val="2B2B2F"/>
                 </a:solidFill>
@@ -14925,14 +14893,8 @@
                 <a:ea typeface="Consolas" pitchFamily="34" charset="-122"/>
                 <a:cs typeface="Consolas" pitchFamily="34" charset="-120"/>
               </a:rPr>
-              <a:t>RETURN p.name AS passenger,</a:t>
-            </a:r>
-            <a:endParaRPr lang="en-US" sz="700" dirty="0"/>
-          </a:p>
-          <a:p>
-            <a:pPr marL="0" indent="0">
-              <a:buNone/>
-            </a:pPr>
+              <a:t>MakesBooking</a:t>
+            </a:r>
             <a:r>
               <a:rPr lang="en-US" sz="700" dirty="0">
                 <a:solidFill>
@@ -14942,20 +14904,10 @@
                 <a:ea typeface="Consolas" pitchFamily="34" charset="-122"/>
                 <a:cs typeface="Consolas" pitchFamily="34" charset="-120"/>
               </a:rPr>
-              <a:t>  f.flight_no AS flight, a.city AS city;</a:t>
-            </a:r>
-            <a:endParaRPr lang="en-US" sz="700" dirty="0"/>
-          </a:p>
-          <a:p>
-            <a:pPr marL="0" indent="0">
-              <a:buNone/>
-            </a:pPr>
-            <a:endParaRPr lang="en-US" sz="700" dirty="0"/>
-          </a:p>
-          <a:p>
-            <a:pPr marL="0" indent="0">
-              <a:buNone/>
-            </a:pPr>
+              <a:t>'){as: b}</a:t>
+            </a:r>
+          </a:p>
+          <a:p>
             <a:r>
               <a:rPr lang="en-US" sz="700" dirty="0">
                 <a:solidFill>
@@ -14965,16 +14917,10 @@
                 <a:ea typeface="Consolas" pitchFamily="34" charset="-122"/>
                 <a:cs typeface="Consolas" pitchFamily="34" charset="-120"/>
               </a:rPr>
-              <a:t>SELECT expand(shortestPath($a, $b, 'OUT'))</a:t>
-            </a:r>
-            <a:endParaRPr lang="en-US" sz="700" dirty="0"/>
-          </a:p>
-          <a:p>
-            <a:pPr marL="0" indent="0">
-              <a:buNone/>
-            </a:pPr>
-            <a:r>
-              <a:rPr lang="en-US" sz="700" dirty="0">
+              <a:t>      .out('</a:t>
+            </a:r>
+            <a:r>
+              <a:rPr lang="en-US" sz="700" dirty="0" err="1">
                 <a:solidFill>
                   <a:srgbClr val="2B2B2F"/>
                 </a:solidFill>
@@ -14982,14 +14928,8 @@
                 <a:ea typeface="Consolas" pitchFamily="34" charset="-122"/>
                 <a:cs typeface="Consolas" pitchFamily="34" charset="-120"/>
               </a:rPr>
-              <a:t>LET $a=(SELECT FROM Airport WHERE code='MAA'),</a:t>
-            </a:r>
-            <a:endParaRPr lang="en-US" sz="700" dirty="0"/>
-          </a:p>
-          <a:p>
-            <a:pPr marL="0" indent="0">
-              <a:buNone/>
-            </a:pPr>
+              <a:t>ForFlight</a:t>
+            </a:r>
             <a:r>
               <a:rPr lang="en-US" sz="700" dirty="0">
                 <a:solidFill>
@@ -14999,7 +14939,263 @@
                 <a:ea typeface="Consolas" pitchFamily="34" charset="-122"/>
                 <a:cs typeface="Consolas" pitchFamily="34" charset="-120"/>
               </a:rPr>
-              <a:t>    $b=(SELECT FROM Airport WHERE code='DEL');</a:t>
+              <a:t>'){as: f}</a:t>
+            </a:r>
+          </a:p>
+          <a:p>
+            <a:r>
+              <a:rPr lang="en-US" sz="700" dirty="0">
+                <a:solidFill>
+                  <a:srgbClr val="2B2B2F"/>
+                </a:solidFill>
+                <a:latin typeface="Consolas" pitchFamily="34" charset="0"/>
+                <a:ea typeface="Consolas" pitchFamily="34" charset="-122"/>
+                <a:cs typeface="Consolas" pitchFamily="34" charset="-120"/>
+              </a:rPr>
+              <a:t>      .out('</a:t>
+            </a:r>
+            <a:r>
+              <a:rPr lang="en-US" sz="700" dirty="0" err="1">
+                <a:solidFill>
+                  <a:srgbClr val="2B2B2F"/>
+                </a:solidFill>
+                <a:latin typeface="Consolas" pitchFamily="34" charset="0"/>
+                <a:ea typeface="Consolas" pitchFamily="34" charset="-122"/>
+                <a:cs typeface="Consolas" pitchFamily="34" charset="-120"/>
+              </a:rPr>
+              <a:t>ArrivesAt</a:t>
+            </a:r>
+            <a:r>
+              <a:rPr lang="en-US" sz="700" dirty="0">
+                <a:solidFill>
+                  <a:srgbClr val="2B2B2F"/>
+                </a:solidFill>
+                <a:latin typeface="Consolas" pitchFamily="34" charset="0"/>
+                <a:ea typeface="Consolas" pitchFamily="34" charset="-122"/>
+                <a:cs typeface="Consolas" pitchFamily="34" charset="-120"/>
+              </a:rPr>
+              <a:t>'){as: a}</a:t>
+            </a:r>
+          </a:p>
+          <a:p>
+            <a:endParaRPr lang="en-US" sz="700" dirty="0">
+              <a:solidFill>
+                <a:srgbClr val="2B2B2F"/>
+              </a:solidFill>
+              <a:latin typeface="Consolas" pitchFamily="34" charset="0"/>
+              <a:ea typeface="Consolas" pitchFamily="34" charset="-122"/>
+              <a:cs typeface="Consolas" pitchFamily="34" charset="-120"/>
+            </a:endParaRPr>
+          </a:p>
+          <a:p>
+            <a:r>
+              <a:rPr lang="en-US" sz="700" dirty="0">
+                <a:solidFill>
+                  <a:srgbClr val="2B2B2F"/>
+                </a:solidFill>
+                <a:latin typeface="Consolas" pitchFamily="34" charset="0"/>
+                <a:ea typeface="Consolas" pitchFamily="34" charset="-122"/>
+                <a:cs typeface="Consolas" pitchFamily="34" charset="-120"/>
+              </a:rPr>
+              <a:t>RETURN p.name AS passenger,</a:t>
+            </a:r>
+          </a:p>
+          <a:p>
+            <a:r>
+              <a:rPr lang="en-US" sz="700" dirty="0">
+                <a:solidFill>
+                  <a:srgbClr val="2B2B2F"/>
+                </a:solidFill>
+                <a:latin typeface="Consolas" pitchFamily="34" charset="0"/>
+                <a:ea typeface="Consolas" pitchFamily="34" charset="-122"/>
+                <a:cs typeface="Consolas" pitchFamily="34" charset="-120"/>
+              </a:rPr>
+              <a:t>       </a:t>
+            </a:r>
+            <a:r>
+              <a:rPr lang="en-US" sz="700" dirty="0" err="1">
+                <a:solidFill>
+                  <a:srgbClr val="2B2B2F"/>
+                </a:solidFill>
+                <a:latin typeface="Consolas" pitchFamily="34" charset="0"/>
+                <a:ea typeface="Consolas" pitchFamily="34" charset="-122"/>
+                <a:cs typeface="Consolas" pitchFamily="34" charset="-120"/>
+              </a:rPr>
+              <a:t>f.flight_no</a:t>
+            </a:r>
+            <a:r>
+              <a:rPr lang="en-US" sz="700" dirty="0">
+                <a:solidFill>
+                  <a:srgbClr val="2B2B2F"/>
+                </a:solidFill>
+                <a:latin typeface="Consolas" pitchFamily="34" charset="0"/>
+                <a:ea typeface="Consolas" pitchFamily="34" charset="-122"/>
+                <a:cs typeface="Consolas" pitchFamily="34" charset="-120"/>
+              </a:rPr>
+              <a:t> AS flight,</a:t>
+            </a:r>
+          </a:p>
+          <a:p>
+            <a:r>
+              <a:rPr lang="en-US" sz="700" dirty="0">
+                <a:solidFill>
+                  <a:srgbClr val="2B2B2F"/>
+                </a:solidFill>
+                <a:latin typeface="Consolas" pitchFamily="34" charset="0"/>
+                <a:ea typeface="Consolas" pitchFamily="34" charset="-122"/>
+                <a:cs typeface="Consolas" pitchFamily="34" charset="-120"/>
+              </a:rPr>
+              <a:t>       </a:t>
+            </a:r>
+            <a:r>
+              <a:rPr lang="en-US" sz="700" dirty="0" err="1">
+                <a:solidFill>
+                  <a:srgbClr val="2B2B2F"/>
+                </a:solidFill>
+                <a:latin typeface="Consolas" pitchFamily="34" charset="0"/>
+                <a:ea typeface="Consolas" pitchFamily="34" charset="-122"/>
+                <a:cs typeface="Consolas" pitchFamily="34" charset="-120"/>
+              </a:rPr>
+              <a:t>a.city</a:t>
+            </a:r>
+            <a:r>
+              <a:rPr lang="en-US" sz="700" dirty="0">
+                <a:solidFill>
+                  <a:srgbClr val="2B2B2F"/>
+                </a:solidFill>
+                <a:latin typeface="Consolas" pitchFamily="34" charset="0"/>
+                <a:ea typeface="Consolas" pitchFamily="34" charset="-122"/>
+                <a:cs typeface="Consolas" pitchFamily="34" charset="-120"/>
+              </a:rPr>
+              <a:t> AS city;</a:t>
+            </a:r>
+          </a:p>
+          <a:p>
+            <a:endParaRPr lang="en-US" sz="700" dirty="0">
+              <a:solidFill>
+                <a:srgbClr val="2B2B2F"/>
+              </a:solidFill>
+              <a:latin typeface="Consolas" pitchFamily="34" charset="0"/>
+              <a:ea typeface="Consolas" pitchFamily="34" charset="-122"/>
+              <a:cs typeface="Consolas" pitchFamily="34" charset="-120"/>
+            </a:endParaRPr>
+          </a:p>
+          <a:p>
+            <a:r>
+              <a:rPr lang="en-US" sz="700" dirty="0">
+                <a:solidFill>
+                  <a:srgbClr val="2B2B2F"/>
+                </a:solidFill>
+                <a:latin typeface="Consolas" pitchFamily="34" charset="0"/>
+                <a:ea typeface="Consolas" pitchFamily="34" charset="-122"/>
+                <a:cs typeface="Consolas" pitchFamily="34" charset="-120"/>
+              </a:rPr>
+              <a:t>2) Find the shortest path from Chennai to Delhi</a:t>
+            </a:r>
+          </a:p>
+          <a:p>
+            <a:r>
+              <a:rPr lang="en-US" sz="700" dirty="0">
+                <a:solidFill>
+                  <a:srgbClr val="2B2B2F"/>
+                </a:solidFill>
+                <a:latin typeface="Consolas" pitchFamily="34" charset="0"/>
+                <a:ea typeface="Consolas" pitchFamily="34" charset="-122"/>
+                <a:cs typeface="Consolas" pitchFamily="34" charset="-120"/>
+              </a:rPr>
+              <a:t>SELECT expand(</a:t>
+            </a:r>
+            <a:r>
+              <a:rPr lang="en-US" sz="700" dirty="0" err="1">
+                <a:solidFill>
+                  <a:srgbClr val="2B2B2F"/>
+                </a:solidFill>
+                <a:latin typeface="Consolas" pitchFamily="34" charset="0"/>
+                <a:ea typeface="Consolas" pitchFamily="34" charset="-122"/>
+                <a:cs typeface="Consolas" pitchFamily="34" charset="-120"/>
+              </a:rPr>
+              <a:t>shortestPath</a:t>
+            </a:r>
+            <a:r>
+              <a:rPr lang="en-US" sz="700" dirty="0">
+                <a:solidFill>
+                  <a:srgbClr val="2B2B2F"/>
+                </a:solidFill>
+                <a:latin typeface="Consolas" pitchFamily="34" charset="0"/>
+                <a:ea typeface="Consolas" pitchFamily="34" charset="-122"/>
+                <a:cs typeface="Consolas" pitchFamily="34" charset="-120"/>
+              </a:rPr>
+              <a:t>($a, $b, 'OUT'))</a:t>
+            </a:r>
+          </a:p>
+          <a:p>
+            <a:r>
+              <a:rPr lang="en-US" sz="700" dirty="0">
+                <a:solidFill>
+                  <a:srgbClr val="2B2B2F"/>
+                </a:solidFill>
+                <a:latin typeface="Consolas" pitchFamily="34" charset="0"/>
+                <a:ea typeface="Consolas" pitchFamily="34" charset="-122"/>
+                <a:cs typeface="Consolas" pitchFamily="34" charset="-120"/>
+              </a:rPr>
+              <a:t>LET $a = (SELECT FROM </a:t>
+            </a:r>
+            <a:r>
+              <a:rPr lang="en-US" sz="700" dirty="0" err="1">
+                <a:solidFill>
+                  <a:srgbClr val="2B2B2F"/>
+                </a:solidFill>
+                <a:latin typeface="Consolas" pitchFamily="34" charset="0"/>
+                <a:ea typeface="Consolas" pitchFamily="34" charset="-122"/>
+                <a:cs typeface="Consolas" pitchFamily="34" charset="-120"/>
+              </a:rPr>
+              <a:t>AirportNode</a:t>
+            </a:r>
+            <a:r>
+              <a:rPr lang="en-US" sz="700" dirty="0">
+                <a:solidFill>
+                  <a:srgbClr val="2B2B2F"/>
+                </a:solidFill>
+                <a:latin typeface="Consolas" pitchFamily="34" charset="0"/>
+                <a:ea typeface="Consolas" pitchFamily="34" charset="-122"/>
+                <a:cs typeface="Consolas" pitchFamily="34" charset="-120"/>
+              </a:rPr>
+              <a:t> WHERE code = 'MAA'),</a:t>
+            </a:r>
+          </a:p>
+          <a:p>
+            <a:r>
+              <a:rPr lang="en-US" sz="700" dirty="0">
+                <a:solidFill>
+                  <a:srgbClr val="2B2B2F"/>
+                </a:solidFill>
+                <a:latin typeface="Consolas" pitchFamily="34" charset="0"/>
+                <a:ea typeface="Consolas" pitchFamily="34" charset="-122"/>
+                <a:cs typeface="Consolas" pitchFamily="34" charset="-120"/>
+              </a:rPr>
+              <a:t>    $b = (SELECT FROM </a:t>
+            </a:r>
+            <a:r>
+              <a:rPr lang="en-US" sz="700" dirty="0" err="1">
+                <a:solidFill>
+                  <a:srgbClr val="2B2B2F"/>
+                </a:solidFill>
+                <a:latin typeface="Consolas" pitchFamily="34" charset="0"/>
+                <a:ea typeface="Consolas" pitchFamily="34" charset="-122"/>
+                <a:cs typeface="Consolas" pitchFamily="34" charset="-120"/>
+              </a:rPr>
+              <a:t>AirportNode</a:t>
+            </a:r>
+            <a:r>
+              <a:rPr lang="en-US" sz="700" dirty="0">
+                <a:solidFill>
+                  <a:srgbClr val="2B2B2F"/>
+                </a:solidFill>
+                <a:latin typeface="Consolas" pitchFamily="34" charset="0"/>
+                <a:ea typeface="Consolas" pitchFamily="34" charset="-122"/>
+                <a:cs typeface="Consolas" pitchFamily="34" charset="-120"/>
+              </a:rPr>
+              <a:t> WHERE code = 'DEL');</a:t>
             </a:r>
             <a:endParaRPr lang="en-US" sz="700" dirty="0"/>
           </a:p>
@@ -15014,7 +15210,7 @@
         <p:spPr>
           <a:xfrm>
             <a:off x="4663440" y="2606040"/>
-            <a:ext cx="4114800" cy="1783080"/>
+            <a:ext cx="4114800" cy="2055992"/>
           </a:xfrm>
           <a:prstGeom prst="rect">
             <a:avLst/>
@@ -15090,9 +15286,6 @@
           <a:bodyPr wrap="square" lIns="0" tIns="0" rIns="0" bIns="0" rtlCol="0" anchor="t"/>
           <a:lstStyle/>
           <a:p>
-            <a:pPr marL="0" indent="0">
-              <a:buNone/>
-            </a:pPr>
             <a:r>
               <a:rPr lang="en-US" sz="700" dirty="0">
                 <a:solidFill>
@@ -15102,14 +15295,10 @@
                 <a:ea typeface="Consolas" pitchFamily="34" charset="-122"/>
                 <a:cs typeface="Consolas" pitchFamily="34" charset="-120"/>
               </a:rPr>
-              <a:t>BEGIN;</a:t>
-            </a:r>
-            <a:endParaRPr lang="en-US" sz="700" dirty="0"/>
-          </a:p>
-          <a:p>
-            <a:pPr marL="0" indent="0">
-              <a:buNone/>
-            </a:pPr>
+              <a:t>1) Book a flight transactionally</a:t>
+            </a:r>
+          </a:p>
+          <a:p>
             <a:r>
               <a:rPr lang="en-US" sz="700" dirty="0">
                 <a:solidFill>
@@ -15119,14 +15308,10 @@
                 <a:ea typeface="Consolas" pitchFamily="34" charset="-122"/>
                 <a:cs typeface="Consolas" pitchFamily="34" charset="-120"/>
               </a:rPr>
-              <a:t>UPDATE Flight SET seats = seats - 1</a:t>
-            </a:r>
-            <a:endParaRPr lang="en-US" sz="700" dirty="0"/>
-          </a:p>
-          <a:p>
-            <a:pPr marL="0" indent="0">
-              <a:buNone/>
-            </a:pPr>
+              <a:t>BEGIN;</a:t>
+            </a:r>
+          </a:p>
+          <a:p>
             <a:r>
               <a:rPr lang="en-US" sz="700" dirty="0">
                 <a:solidFill>
@@ -15136,14 +15321,10 @@
                 <a:ea typeface="Consolas" pitchFamily="34" charset="-122"/>
                 <a:cs typeface="Consolas" pitchFamily="34" charset="-120"/>
               </a:rPr>
-              <a:t>  WHERE flight_no='AI101';</a:t>
-            </a:r>
-            <a:endParaRPr lang="en-US" sz="700" dirty="0"/>
-          </a:p>
-          <a:p>
-            <a:pPr marL="0" indent="0">
-              <a:buNone/>
-            </a:pPr>
+              <a:t>UPDATE Flight</a:t>
+            </a:r>
+          </a:p>
+          <a:p>
             <a:r>
               <a:rPr lang="en-US" sz="700" dirty="0">
                 <a:solidFill>
@@ -15153,14 +15334,10 @@
                 <a:ea typeface="Consolas" pitchFamily="34" charset="-122"/>
                 <a:cs typeface="Consolas" pitchFamily="34" charset="-120"/>
               </a:rPr>
-              <a:t>CREATE EDGE Booked FROM</a:t>
-            </a:r>
-            <a:endParaRPr lang="en-US" sz="700" dirty="0"/>
-          </a:p>
-          <a:p>
-            <a:pPr marL="0" indent="0">
-              <a:buNone/>
-            </a:pPr>
+              <a:t>SET seats = seats - 1</a:t>
+            </a:r>
+          </a:p>
+          <a:p>
             <a:r>
               <a:rPr lang="en-US" sz="700" dirty="0">
                 <a:solidFill>
@@ -15170,16 +15347,10 @@
                 <a:ea typeface="Consolas" pitchFamily="34" charset="-122"/>
                 <a:cs typeface="Consolas" pitchFamily="34" charset="-120"/>
               </a:rPr>
-              <a:t>  (SELECT FROM Passenger WHERE pid=1) TO</a:t>
-            </a:r>
-            <a:endParaRPr lang="en-US" sz="700" dirty="0"/>
-          </a:p>
-          <a:p>
-            <a:pPr marL="0" indent="0">
-              <a:buNone/>
-            </a:pPr>
-            <a:r>
-              <a:rPr lang="en-US" sz="700" dirty="0">
+              <a:t>WHERE </a:t>
+            </a:r>
+            <a:r>
+              <a:rPr lang="en-US" sz="700" dirty="0" err="1">
                 <a:solidFill>
                   <a:srgbClr val="2B2B2F"/>
                 </a:solidFill>
@@ -15187,14 +15358,8 @@
                 <a:ea typeface="Consolas" pitchFamily="34" charset="-122"/>
                 <a:cs typeface="Consolas" pitchFamily="34" charset="-120"/>
               </a:rPr>
-              <a:t>  (SELECT FROM Flight WHERE flight_no='AI101')</a:t>
-            </a:r>
-            <a:endParaRPr lang="en-US" sz="700" dirty="0"/>
-          </a:p>
-          <a:p>
-            <a:pPr marL="0" indent="0">
-              <a:buNone/>
-            </a:pPr>
+              <a:t>flight_no</a:t>
+            </a:r>
             <a:r>
               <a:rPr lang="en-US" sz="700" dirty="0">
                 <a:solidFill>
@@ -15204,14 +15369,10 @@
                 <a:ea typeface="Consolas" pitchFamily="34" charset="-122"/>
                 <a:cs typeface="Consolas" pitchFamily="34" charset="-120"/>
               </a:rPr>
-              <a:t>  SET seat_no='12A';</a:t>
-            </a:r>
-            <a:endParaRPr lang="en-US" sz="700" dirty="0"/>
-          </a:p>
-          <a:p>
-            <a:pPr marL="0" indent="0">
-              <a:buNone/>
-            </a:pPr>
+              <a:t> = 'AI101';</a:t>
+            </a:r>
+          </a:p>
+          <a:p>
             <a:r>
               <a:rPr lang="en-US" sz="700" dirty="0">
                 <a:solidFill>
@@ -15221,22 +15382,10 @@
                 <a:ea typeface="Consolas" pitchFamily="34" charset="-122"/>
                 <a:cs typeface="Consolas" pitchFamily="34" charset="-120"/>
               </a:rPr>
-              <a:t>COMMIT;</a:t>
-            </a:r>
-            <a:endParaRPr lang="en-US" sz="700" dirty="0"/>
-          </a:p>
-          <a:p>
-            <a:pPr marL="0" indent="0">
-              <a:buNone/>
-            </a:pPr>
-            <a:endParaRPr lang="en-US" sz="700" dirty="0"/>
-          </a:p>
-          <a:p>
-            <a:pPr marL="0" indent="0">
-              <a:buNone/>
-            </a:pPr>
-            <a:r>
-              <a:rPr lang="en-US" sz="700" dirty="0">
+              <a:t>CREATE EDGE </a:t>
+            </a:r>
+            <a:r>
+              <a:rPr lang="en-US" sz="700" dirty="0" err="1">
                 <a:solidFill>
                   <a:srgbClr val="2B2B2F"/>
                 </a:solidFill>
@@ -15244,48 +15393,314 @@
                 <a:ea typeface="Consolas" pitchFamily="34" charset="-122"/>
                 <a:cs typeface="Consolas" pitchFamily="34" charset="-120"/>
               </a:rPr>
-              <a:t>CREATE INDEX Booked.seat ON Booked(seat_no) NOTUNIQUE;</a:t>
+              <a:t>MakesBooking</a:t>
+            </a:r>
+            <a:r>
+              <a:rPr lang="en-US" sz="700" dirty="0">
+                <a:solidFill>
+                  <a:srgbClr val="2B2B2F"/>
+                </a:solidFill>
+                <a:latin typeface="Consolas" pitchFamily="34" charset="0"/>
+                <a:ea typeface="Consolas" pitchFamily="34" charset="-122"/>
+                <a:cs typeface="Consolas" pitchFamily="34" charset="-120"/>
+              </a:rPr>
+              <a:t> FROM (SELECT FROM Passenger WHERE </a:t>
+            </a:r>
+            <a:r>
+              <a:rPr lang="en-US" sz="700" dirty="0" err="1">
+                <a:solidFill>
+                  <a:srgbClr val="2B2B2F"/>
+                </a:solidFill>
+                <a:latin typeface="Consolas" pitchFamily="34" charset="0"/>
+                <a:ea typeface="Consolas" pitchFamily="34" charset="-122"/>
+                <a:cs typeface="Consolas" pitchFamily="34" charset="-120"/>
+              </a:rPr>
+              <a:t>pid</a:t>
+            </a:r>
+            <a:r>
+              <a:rPr lang="en-US" sz="700" dirty="0">
+                <a:solidFill>
+                  <a:srgbClr val="2B2B2F"/>
+                </a:solidFill>
+                <a:latin typeface="Consolas" pitchFamily="34" charset="0"/>
+                <a:ea typeface="Consolas" pitchFamily="34" charset="-122"/>
+                <a:cs typeface="Consolas" pitchFamily="34" charset="-120"/>
+              </a:rPr>
+              <a:t> = 1) TO</a:t>
+            </a:r>
+          </a:p>
+          <a:p>
+            <a:r>
+              <a:rPr lang="en-US" sz="700" dirty="0">
+                <a:solidFill>
+                  <a:srgbClr val="2B2B2F"/>
+                </a:solidFill>
+                <a:latin typeface="Consolas" pitchFamily="34" charset="0"/>
+                <a:ea typeface="Consolas" pitchFamily="34" charset="-122"/>
+                <a:cs typeface="Consolas" pitchFamily="34" charset="-120"/>
+              </a:rPr>
+              <a:t>(CREATE VERTEX Booking SET </a:t>
+            </a:r>
+            <a:r>
+              <a:rPr lang="en-US" sz="700" dirty="0" err="1">
+                <a:solidFill>
+                  <a:srgbClr val="2B2B2F"/>
+                </a:solidFill>
+                <a:latin typeface="Consolas" pitchFamily="34" charset="0"/>
+                <a:ea typeface="Consolas" pitchFamily="34" charset="-122"/>
+                <a:cs typeface="Consolas" pitchFamily="34" charset="-120"/>
+              </a:rPr>
+              <a:t>seat_no</a:t>
+            </a:r>
+            <a:r>
+              <a:rPr lang="en-US" sz="700" dirty="0">
+                <a:solidFill>
+                  <a:srgbClr val="2B2B2F"/>
+                </a:solidFill>
+                <a:latin typeface="Consolas" pitchFamily="34" charset="0"/>
+                <a:ea typeface="Consolas" pitchFamily="34" charset="-122"/>
+                <a:cs typeface="Consolas" pitchFamily="34" charset="-120"/>
+              </a:rPr>
+              <a:t> = '12A’) SET </a:t>
+            </a:r>
+            <a:r>
+              <a:rPr lang="en-US" sz="700" dirty="0" err="1">
+                <a:solidFill>
+                  <a:srgbClr val="2B2B2F"/>
+                </a:solidFill>
+                <a:latin typeface="Consolas" pitchFamily="34" charset="0"/>
+                <a:ea typeface="Consolas" pitchFamily="34" charset="-122"/>
+                <a:cs typeface="Consolas" pitchFamily="34" charset="-120"/>
+              </a:rPr>
+              <a:t>seat_no</a:t>
+            </a:r>
+            <a:r>
+              <a:rPr lang="en-US" sz="700" dirty="0">
+                <a:solidFill>
+                  <a:srgbClr val="2B2B2F"/>
+                </a:solidFill>
+                <a:latin typeface="Consolas" pitchFamily="34" charset="0"/>
+                <a:ea typeface="Consolas" pitchFamily="34" charset="-122"/>
+                <a:cs typeface="Consolas" pitchFamily="34" charset="-120"/>
+              </a:rPr>
+              <a:t> = '12A';</a:t>
+            </a:r>
+          </a:p>
+          <a:p>
+            <a:endParaRPr lang="en-US" sz="700" dirty="0">
+              <a:solidFill>
+                <a:srgbClr val="2B2B2F"/>
+              </a:solidFill>
+              <a:latin typeface="Consolas" pitchFamily="34" charset="0"/>
+              <a:ea typeface="Consolas" pitchFamily="34" charset="-122"/>
+              <a:cs typeface="Consolas" pitchFamily="34" charset="-120"/>
+            </a:endParaRPr>
+          </a:p>
+          <a:p>
+            <a:r>
+              <a:rPr lang="en-US" sz="700" dirty="0">
+                <a:solidFill>
+                  <a:srgbClr val="2B2B2F"/>
+                </a:solidFill>
+                <a:latin typeface="Consolas" pitchFamily="34" charset="0"/>
+                <a:ea typeface="Consolas" pitchFamily="34" charset="-122"/>
+                <a:cs typeface="Consolas" pitchFamily="34" charset="-120"/>
+              </a:rPr>
+              <a:t>CREATE EDGE </a:t>
+            </a:r>
+            <a:r>
+              <a:rPr lang="en-US" sz="700" dirty="0" err="1">
+                <a:solidFill>
+                  <a:srgbClr val="2B2B2F"/>
+                </a:solidFill>
+                <a:latin typeface="Consolas" pitchFamily="34" charset="0"/>
+                <a:ea typeface="Consolas" pitchFamily="34" charset="-122"/>
+                <a:cs typeface="Consolas" pitchFamily="34" charset="-120"/>
+              </a:rPr>
+              <a:t>ForFlight</a:t>
+            </a:r>
+            <a:r>
+              <a:rPr lang="en-US" sz="700" dirty="0">
+                <a:solidFill>
+                  <a:srgbClr val="2B2B2F"/>
+                </a:solidFill>
+                <a:latin typeface="Consolas" pitchFamily="34" charset="0"/>
+                <a:ea typeface="Consolas" pitchFamily="34" charset="-122"/>
+                <a:cs typeface="Consolas" pitchFamily="34" charset="-120"/>
+              </a:rPr>
+              <a:t> FROM (SELECT FROM Booking WHERE </a:t>
+            </a:r>
+            <a:r>
+              <a:rPr lang="en-US" sz="700" dirty="0" err="1">
+                <a:solidFill>
+                  <a:srgbClr val="2B2B2F"/>
+                </a:solidFill>
+                <a:latin typeface="Consolas" pitchFamily="34" charset="0"/>
+                <a:ea typeface="Consolas" pitchFamily="34" charset="-122"/>
+                <a:cs typeface="Consolas" pitchFamily="34" charset="-120"/>
+              </a:rPr>
+              <a:t>seat_no</a:t>
+            </a:r>
+            <a:r>
+              <a:rPr lang="en-US" sz="700" dirty="0">
+                <a:solidFill>
+                  <a:srgbClr val="2B2B2F"/>
+                </a:solidFill>
+                <a:latin typeface="Consolas" pitchFamily="34" charset="0"/>
+                <a:ea typeface="Consolas" pitchFamily="34" charset="-122"/>
+                <a:cs typeface="Consolas" pitchFamily="34" charset="-120"/>
+              </a:rPr>
+              <a:t> = '12A')</a:t>
+            </a:r>
+          </a:p>
+          <a:p>
+            <a:r>
+              <a:rPr lang="en-US" sz="700" dirty="0">
+                <a:solidFill>
+                  <a:srgbClr val="2B2B2F"/>
+                </a:solidFill>
+                <a:latin typeface="Consolas" pitchFamily="34" charset="0"/>
+                <a:ea typeface="Consolas" pitchFamily="34" charset="-122"/>
+                <a:cs typeface="Consolas" pitchFamily="34" charset="-120"/>
+              </a:rPr>
+              <a:t>TO (SELECT FROM Flight WHERE </a:t>
+            </a:r>
+            <a:r>
+              <a:rPr lang="en-US" sz="700" dirty="0" err="1">
+                <a:solidFill>
+                  <a:srgbClr val="2B2B2F"/>
+                </a:solidFill>
+                <a:latin typeface="Consolas" pitchFamily="34" charset="0"/>
+                <a:ea typeface="Consolas" pitchFamily="34" charset="-122"/>
+                <a:cs typeface="Consolas" pitchFamily="34" charset="-120"/>
+              </a:rPr>
+              <a:t>flight_no</a:t>
+            </a:r>
+            <a:r>
+              <a:rPr lang="en-US" sz="700" dirty="0">
+                <a:solidFill>
+                  <a:srgbClr val="2B2B2F"/>
+                </a:solidFill>
+                <a:latin typeface="Consolas" pitchFamily="34" charset="0"/>
+                <a:ea typeface="Consolas" pitchFamily="34" charset="-122"/>
+                <a:cs typeface="Consolas" pitchFamily="34" charset="-120"/>
+              </a:rPr>
+              <a:t> = 'AI101');</a:t>
+            </a:r>
+          </a:p>
+          <a:p>
+            <a:endParaRPr lang="en-US" sz="700" dirty="0">
+              <a:solidFill>
+                <a:srgbClr val="2B2B2F"/>
+              </a:solidFill>
+              <a:latin typeface="Consolas" pitchFamily="34" charset="0"/>
+              <a:ea typeface="Consolas" pitchFamily="34" charset="-122"/>
+              <a:cs typeface="Consolas" pitchFamily="34" charset="-120"/>
+            </a:endParaRPr>
+          </a:p>
+          <a:p>
+            <a:r>
+              <a:rPr lang="en-US" sz="700" dirty="0">
+                <a:solidFill>
+                  <a:srgbClr val="2B2B2F"/>
+                </a:solidFill>
+                <a:latin typeface="Consolas" pitchFamily="34" charset="0"/>
+                <a:ea typeface="Consolas" pitchFamily="34" charset="-122"/>
+                <a:cs typeface="Consolas" pitchFamily="34" charset="-120"/>
+              </a:rPr>
+              <a:t>COMMIT;</a:t>
+            </a:r>
+          </a:p>
+          <a:p>
+            <a:endParaRPr lang="en-US" sz="700" dirty="0">
+              <a:solidFill>
+                <a:srgbClr val="2B2B2F"/>
+              </a:solidFill>
+              <a:latin typeface="Consolas" pitchFamily="34" charset="0"/>
+              <a:ea typeface="Consolas" pitchFamily="34" charset="-122"/>
+              <a:cs typeface="Consolas" pitchFamily="34" charset="-120"/>
+            </a:endParaRPr>
+          </a:p>
+          <a:p>
+            <a:r>
+              <a:rPr lang="en-US" sz="700" dirty="0">
+                <a:solidFill>
+                  <a:srgbClr val="2B2B2F"/>
+                </a:solidFill>
+                <a:latin typeface="Consolas" pitchFamily="34" charset="0"/>
+                <a:ea typeface="Consolas" pitchFamily="34" charset="-122"/>
+                <a:cs typeface="Consolas" pitchFamily="34" charset="-120"/>
+              </a:rPr>
+              <a:t>2) Create an index on the booking seat number</a:t>
+            </a:r>
+          </a:p>
+          <a:p>
+            <a:endParaRPr lang="en-US" sz="700" dirty="0">
+              <a:solidFill>
+                <a:srgbClr val="2B2B2F"/>
+              </a:solidFill>
+              <a:latin typeface="Consolas" pitchFamily="34" charset="0"/>
+              <a:ea typeface="Consolas" pitchFamily="34" charset="-122"/>
+              <a:cs typeface="Consolas" pitchFamily="34" charset="-120"/>
+            </a:endParaRPr>
+          </a:p>
+          <a:p>
+            <a:r>
+              <a:rPr lang="en-US" sz="700" dirty="0">
+                <a:solidFill>
+                  <a:srgbClr val="2B2B2F"/>
+                </a:solidFill>
+                <a:latin typeface="Consolas" pitchFamily="34" charset="0"/>
+                <a:ea typeface="Consolas" pitchFamily="34" charset="-122"/>
+                <a:cs typeface="Consolas" pitchFamily="34" charset="-120"/>
+              </a:rPr>
+              <a:t>CREATE INDEX </a:t>
+            </a:r>
+            <a:r>
+              <a:rPr lang="en-US" sz="700" dirty="0" err="1">
+                <a:solidFill>
+                  <a:srgbClr val="2B2B2F"/>
+                </a:solidFill>
+                <a:latin typeface="Consolas" pitchFamily="34" charset="0"/>
+                <a:ea typeface="Consolas" pitchFamily="34" charset="-122"/>
+                <a:cs typeface="Consolas" pitchFamily="34" charset="-120"/>
+              </a:rPr>
+              <a:t>Booking.seat</a:t>
+            </a:r>
+            <a:r>
+              <a:rPr lang="en-US" sz="700" dirty="0">
+                <a:solidFill>
+                  <a:srgbClr val="2B2B2F"/>
+                </a:solidFill>
+                <a:latin typeface="Consolas" pitchFamily="34" charset="0"/>
+                <a:ea typeface="Consolas" pitchFamily="34" charset="-122"/>
+                <a:cs typeface="Consolas" pitchFamily="34" charset="-120"/>
+              </a:rPr>
+              <a:t> ON Booking(</a:t>
+            </a:r>
+            <a:r>
+              <a:rPr lang="en-US" sz="700" dirty="0" err="1">
+                <a:solidFill>
+                  <a:srgbClr val="2B2B2F"/>
+                </a:solidFill>
+                <a:latin typeface="Consolas" pitchFamily="34" charset="0"/>
+                <a:ea typeface="Consolas" pitchFamily="34" charset="-122"/>
+                <a:cs typeface="Consolas" pitchFamily="34" charset="-120"/>
+              </a:rPr>
+              <a:t>seat_no</a:t>
+            </a:r>
+            <a:r>
+              <a:rPr lang="en-US" sz="700" dirty="0">
+                <a:solidFill>
+                  <a:srgbClr val="2B2B2F"/>
+                </a:solidFill>
+                <a:latin typeface="Consolas" pitchFamily="34" charset="0"/>
+                <a:ea typeface="Consolas" pitchFamily="34" charset="-122"/>
+                <a:cs typeface="Consolas" pitchFamily="34" charset="-120"/>
+              </a:rPr>
+              <a:t>) NOTUNIQUE;</a:t>
             </a:r>
             <a:endParaRPr lang="en-US" sz="700" dirty="0"/>
-          </a:p>
-        </p:txBody>
-      </p:sp>
-      <p:sp>
-        <p:nvSpPr>
-          <p:cNvPr id="18" name="Text 16"/>
-          <p:cNvSpPr txBox="1"/>
-          <p:nvPr/>
-        </p:nvSpPr>
-        <p:spPr>
-          <a:xfrm>
-            <a:off x="365760" y="4498848"/>
-            <a:ext cx="8412480" cy="228600"/>
-          </a:xfrm>
-          <a:prstGeom prst="rect">
-            <a:avLst/>
-          </a:prstGeom>
-          <a:noFill/>
-          <a:ln/>
-        </p:spPr>
-        <p:txBody>
-          <a:bodyPr wrap="square" lIns="0" tIns="0" rIns="0" bIns="0" rtlCol="0" anchor="ctr"/>
-          <a:lstStyle/>
-          <a:p>
-            <a:pPr marL="0" indent="0">
-              <a:buNone/>
-            </a:pPr>
-            <a:r>
-              <a:rPr lang="en-US" sz="800" i="1" dirty="0">
-                <a:solidFill>
-                  <a:srgbClr val="6B6358"/>
-                </a:solidFill>
-                <a:latin typeface="Calibri" pitchFamily="34" charset="0"/>
-                <a:ea typeface="Calibri" pitchFamily="34" charset="-122"/>
-                <a:cs typeface="Calibri" pitchFamily="34" charset="-120"/>
-              </a:rPr>
-              <a:t>Run each query in OrientDB Studio/console and add output screenshots.</a:t>
-            </a:r>
-            <a:endParaRPr lang="en-US" sz="800" dirty="0"/>
           </a:p>
         </p:txBody>
       </p:sp>
@@ -25961,7 +26376,7 @@
                 <a:ea typeface="Calibri" pitchFamily="34" charset="-122"/>
                 <a:cs typeface="Calibri" pitchFamily="34" charset="-120"/>
               </a:rPr>
-              <a:t>MANDATORY, NOTNULL, MIN, MAX, REGEXP, READONLY</a:t>
+              <a:t>MANDATORY, NOTNULL, MIN, MAX, READONLY, FULLTEXT,UNIQUE</a:t>
             </a:r>
             <a:endParaRPr lang="en-US" sz="1000" dirty="0"/>
           </a:p>
